--- a/module1/presentation/output/模块一成果汇报.pptx
+++ b/module1/presentation/output/模块一成果汇报.pptx
@@ -2,23 +2,23 @@
 <file path=ppt/presentation.xml><?xml version="1.0" encoding="utf-8"?>
 <p:presentation xmlns:p="http://schemas.openxmlformats.org/presentationml/2006/main">
   <p:sldMasterIdLst>
-    <p:sldMasterId xmlns:r="http://schemas.openxmlformats.org/officeDocument/2006/relationships" id="2147483648" r:id="Rc9f9bbb06dec4725"/>
+    <p:sldMasterId xmlns:r="http://schemas.openxmlformats.org/officeDocument/2006/relationships" id="2147483648" r:id="R69a2cb6e1c30485b"/>
   </p:sldMasterIdLst>
   <p:notesMasterIdLst>
-    <p:notesMasterId xmlns:r="http://schemas.openxmlformats.org/officeDocument/2006/relationships" r:id="Rd36b429727d4450b"/>
+    <p:notesMasterId xmlns:r="http://schemas.openxmlformats.org/officeDocument/2006/relationships" r:id="Raf4bafc17eb849d0"/>
   </p:notesMasterIdLst>
   <p:sldIdLst>
-    <p:sldId xmlns:r="http://schemas.openxmlformats.org/officeDocument/2006/relationships" id="256" r:id="R4bf28c5fe38c42e1"/>
-    <p:sldId xmlns:r="http://schemas.openxmlformats.org/officeDocument/2006/relationships" id="257" r:id="Rec49f31ffcf649a8"/>
-    <p:sldId xmlns:r="http://schemas.openxmlformats.org/officeDocument/2006/relationships" id="258" r:id="Rf5dacac9f57a4244"/>
-    <p:sldId xmlns:r="http://schemas.openxmlformats.org/officeDocument/2006/relationships" id="259" r:id="R66d807f965384006"/>
-    <p:sldId xmlns:r="http://schemas.openxmlformats.org/officeDocument/2006/relationships" id="260" r:id="R05d9c0e80d3d4ef5"/>
-    <p:sldId xmlns:r="http://schemas.openxmlformats.org/officeDocument/2006/relationships" id="261" r:id="R624bed9876744138"/>
-    <p:sldId xmlns:r="http://schemas.openxmlformats.org/officeDocument/2006/relationships" id="262" r:id="R2ec5191ffaf34d0b"/>
-    <p:sldId xmlns:r="http://schemas.openxmlformats.org/officeDocument/2006/relationships" id="263" r:id="Rdad7d0ebc2f4439c"/>
-    <p:sldId xmlns:r="http://schemas.openxmlformats.org/officeDocument/2006/relationships" id="264" r:id="Reddebea42f40401d"/>
-    <p:sldId xmlns:r="http://schemas.openxmlformats.org/officeDocument/2006/relationships" id="265" r:id="R1abeea2e0c5844a9"/>
-    <p:sldId xmlns:r="http://schemas.openxmlformats.org/officeDocument/2006/relationships" id="266" r:id="Rdc505fec45784967"/>
+    <p:sldId xmlns:r="http://schemas.openxmlformats.org/officeDocument/2006/relationships" id="256" r:id="Rd166f8ac6ad9489e"/>
+    <p:sldId xmlns:r="http://schemas.openxmlformats.org/officeDocument/2006/relationships" id="257" r:id="Rb7818944e5f94474"/>
+    <p:sldId xmlns:r="http://schemas.openxmlformats.org/officeDocument/2006/relationships" id="258" r:id="R35934ec8760d45ae"/>
+    <p:sldId xmlns:r="http://schemas.openxmlformats.org/officeDocument/2006/relationships" id="259" r:id="Rc52ce05a0c384c9a"/>
+    <p:sldId xmlns:r="http://schemas.openxmlformats.org/officeDocument/2006/relationships" id="260" r:id="R93f92bebb77648fc"/>
+    <p:sldId xmlns:r="http://schemas.openxmlformats.org/officeDocument/2006/relationships" id="261" r:id="R2f8d1548b09f45ed"/>
+    <p:sldId xmlns:r="http://schemas.openxmlformats.org/officeDocument/2006/relationships" id="262" r:id="R921145d927194b3d"/>
+    <p:sldId xmlns:r="http://schemas.openxmlformats.org/officeDocument/2006/relationships" id="263" r:id="Re0e703da0fc840b8"/>
+    <p:sldId xmlns:r="http://schemas.openxmlformats.org/officeDocument/2006/relationships" id="264" r:id="R6393e9c919f748bc"/>
+    <p:sldId xmlns:r="http://schemas.openxmlformats.org/officeDocument/2006/relationships" id="265" r:id="R0e9120a3e1924b6b"/>
+    <p:sldId xmlns:r="http://schemas.openxmlformats.org/officeDocument/2006/relationships" id="266" r:id="R249315f0d3c64184"/>
   </p:sldIdLst>
   <p:sldSz cx="12192000" cy="6858000"/>
   <p:notesSz cx="6858000" cy="9144000"/>
@@ -1220,7 +1220,7 @@
   </p:cSld>
   <p:clrMap bg1="lt1" tx1="dk1" bg2="lt2" tx2="dk2" accent1="accent1" accent2="accent2" accent3="accent3" accent4="accent4" accent5="accent5" accent6="accent6" hlink="hlink" folHlink="folHlink"/>
   <p:sldLayoutIdLst>
-    <p:sldLayoutId xmlns:r="http://schemas.openxmlformats.org/officeDocument/2006/relationships" id="2147483649" r:id="R4fb52a5c34f14c3e"/>
+    <p:sldLayoutId xmlns:r="http://schemas.openxmlformats.org/officeDocument/2006/relationships" id="2147483649" r:id="Ra04cc96d2b7a4354"/>
   </p:sldLayoutIdLst>
   <p:txStyles>
     <p:titleStyle>
@@ -1771,7 +1771,7 @@
           <p:cNvPr id="5" name="">
             <a:extLst xmlns:a="http://schemas.openxmlformats.org/drawingml/2006/main">
               <a:ext uri="{FF2B5EF4-FFF2-40B4-BE49-F238E27FC236}">
-                <a16:creationId xmlns:a16="http://schemas.microsoft.com/office/drawing/2014/main" id="{1295C8C4-9DBE-40BC-AC2B-4F756C1A4DE2}"/>
+                <a16:creationId xmlns:a16="http://schemas.microsoft.com/office/drawing/2014/main" id="{2E0E2933-D814-45AB-8F25-6A5418CF890C}"/>
               </a:ext>
             </a:extLst>
           </p:cNvPr>
@@ -1802,9 +1802,9 @@
                 <a:solidFill>
                   <a:srgbClr val="FFFFFF"/>
                 </a:solidFill>
-                <a:latin typeface="STSong"/>
-                <a:ea typeface="STSong"/>
-                <a:cs typeface="STSong"/>
+                <a:latin typeface="Arial"/>
+                <a:ea typeface="Arial"/>
+                <a:cs typeface="Arial"/>
               </a:defRPr>
             </a:pPr>
             <a:r>
@@ -1812,11 +1812,11 @@
                 <a:solidFill>
                   <a:srgbClr val="FFFFFF"/>
                 </a:solidFill>
-                <a:latin typeface="STSong"/>
-                <a:ea typeface="STSong"/>
-                <a:cs typeface="STSong"/>
-              </a:rPr>
-              <a:t>模块一：测试基础实践</a:t>
+                <a:latin typeface="Arial"/>
+                <a:ea typeface="Arial"/>
+                <a:cs typeface="Arial"/>
+              </a:rPr>
+              <a:t>Module 1 Testing Practice</a:t>
             </a:r>
           </a:p>
         </p:txBody>
@@ -1826,7 +1826,7 @@
           <p:cNvPr id="2" name="">
             <a:extLst xmlns:a="http://schemas.openxmlformats.org/drawingml/2006/main">
               <a:ext uri="{FF2B5EF4-FFF2-40B4-BE49-F238E27FC236}">
-                <a16:creationId xmlns:a16="http://schemas.microsoft.com/office/drawing/2014/main" id="{59A602D7-6DF1-4CF3-8F95-1DD2BB09B4E1}"/>
+                <a16:creationId xmlns:a16="http://schemas.microsoft.com/office/drawing/2014/main" id="{E470CA31-C57C-4DCC-92DC-65C18C809B57}"/>
               </a:ext>
             </a:extLst>
           </p:cNvPr>
@@ -1857,9 +1857,9 @@
                 <a:solidFill>
                   <a:srgbClr val="BEE3F8"/>
                 </a:solidFill>
-                <a:latin typeface="STSong"/>
-                <a:ea typeface="STSong"/>
-                <a:cs typeface="STSong"/>
+                <a:latin typeface="Arial"/>
+                <a:ea typeface="Arial"/>
+                <a:cs typeface="Arial"/>
               </a:defRPr>
             </a:pPr>
             <a:r>
@@ -1867,11 +1867,11 @@
                 <a:solidFill>
                   <a:srgbClr val="BEE3F8"/>
                 </a:solidFill>
-                <a:latin typeface="STSong"/>
-                <a:ea typeface="STSong"/>
-                <a:cs typeface="STSong"/>
-              </a:rPr>
-              <a:t>croniter 6.2.2 · 课程成果汇报</a:t>
+                <a:latin typeface="Arial"/>
+                <a:ea typeface="Arial"/>
+                <a:cs typeface="Arial"/>
+              </a:rPr>
+              <a:t>croniter 6.2.2 - course deliverables</a:t>
             </a:r>
           </a:p>
         </p:txBody>
@@ -1881,7 +1881,7 @@
           <p:cNvPr id="3" name="">
             <a:extLst xmlns:a="http://schemas.openxmlformats.org/drawingml/2006/main">
               <a:ext uri="{FF2B5EF4-FFF2-40B4-BE49-F238E27FC236}">
-                <a16:creationId xmlns:a16="http://schemas.microsoft.com/office/drawing/2014/main" id="{4BA0AE7C-05C5-4775-B2BB-D6CDD5708F7F}"/>
+                <a16:creationId xmlns:a16="http://schemas.microsoft.com/office/drawing/2014/main" id="{7A2ED1BE-4D9B-457A-98E0-BA3F1C966012}"/>
               </a:ext>
             </a:extLst>
           </p:cNvPr>
@@ -1912,9 +1912,9 @@
                 <a:solidFill>
                   <a:srgbClr val="FFFFFF"/>
                 </a:solidFill>
-                <a:latin typeface="STSong"/>
-                <a:ea typeface="STSong"/>
-                <a:cs typeface="STSong"/>
+                <a:latin typeface="Arial"/>
+                <a:ea typeface="Arial"/>
+                <a:cs typeface="Arial"/>
               </a:defRPr>
             </a:pPr>
             <a:r>
@@ -1922,11 +1922,11 @@
                 <a:solidFill>
                   <a:srgbClr val="FFFFFF"/>
                 </a:solidFill>
-                <a:latin typeface="STSong"/>
-                <a:ea typeface="STSong"/>
-                <a:cs typeface="STSong"/>
-              </a:rPr>
-              <a:t>41 passed · 36 条测试用例 · 3 个公开历史缺陷</a:t>
+                <a:latin typeface="Arial"/>
+                <a:ea typeface="Arial"/>
+                <a:cs typeface="Arial"/>
+              </a:rPr>
+              <a:t>41 passed | 36 test cases | 3 public historical defects</a:t>
             </a:r>
           </a:p>
         </p:txBody>
@@ -1936,7 +1936,7 @@
           <p:cNvPr id="4" name="">
             <a:extLst xmlns:a="http://schemas.openxmlformats.org/drawingml/2006/main">
               <a:ext uri="{FF2B5EF4-FFF2-40B4-BE49-F238E27FC236}">
-                <a16:creationId xmlns:a16="http://schemas.microsoft.com/office/drawing/2014/main" id="{703AFCA5-AC17-4C29-AEAC-C8D8789EB001}"/>
+                <a16:creationId xmlns:a16="http://schemas.microsoft.com/office/drawing/2014/main" id="{55EFE7C8-F719-489B-9911-E16E33729E57}"/>
               </a:ext>
             </a:extLst>
           </p:cNvPr>
@@ -1967,9 +1967,9 @@
                 <a:solidFill>
                   <a:srgbClr val="BEE3F8"/>
                 </a:solidFill>
-                <a:latin typeface="STSong"/>
-                <a:ea typeface="STSong"/>
-                <a:cs typeface="STSong"/>
+                <a:latin typeface="Arial"/>
+                <a:ea typeface="Arial"/>
+                <a:cs typeface="Arial"/>
               </a:defRPr>
             </a:pPr>
             <a:r>
@@ -1977,9 +1977,9 @@
                 <a:solidFill>
                   <a:srgbClr val="BEE3F8"/>
                 </a:solidFill>
-                <a:latin typeface="STSong"/>
-                <a:ea typeface="STSong"/>
-                <a:cs typeface="STSong"/>
+                <a:latin typeface="Arial"/>
+                <a:ea typeface="Arial"/>
+                <a:cs typeface="Arial"/>
               </a:rPr>
               <a:t>01</a:t>
             </a:r>
@@ -1989,7 +1989,7 @@
     </p:spTree>
     <p:extLst>
       <p:ext uri="{BB962C8B-B14F-4D97-AF65-F5344CB8AC3E}">
-        <p14:creationId xmlns:p14="http://schemas.microsoft.com/office/powerpoint/2010/main" val="671825833"/>
+        <p14:creationId xmlns:p14="http://schemas.microsoft.com/office/powerpoint/2010/main" val="361377212"/>
       </p:ext>
     </p:extLst>
   </p:cSld>
@@ -2020,7 +2020,7 @@
           <p:cNvPr id="5" name="">
             <a:extLst xmlns:a="http://schemas.openxmlformats.org/drawingml/2006/main">
               <a:ext uri="{FF2B5EF4-FFF2-40B4-BE49-F238E27FC236}">
-                <a16:creationId xmlns:a16="http://schemas.microsoft.com/office/drawing/2014/main" id="{81719D45-75AB-451E-BC7C-4411127EE7C6}"/>
+                <a16:creationId xmlns:a16="http://schemas.microsoft.com/office/drawing/2014/main" id="{219019AE-4353-4B83-8A86-E9CE3AC6F388}"/>
               </a:ext>
             </a:extLst>
           </p:cNvPr>
@@ -2051,9 +2051,9 @@
                 <a:solidFill>
                   <a:srgbClr val="102A43"/>
                 </a:solidFill>
-                <a:latin typeface="STSong"/>
-                <a:ea typeface="STSong"/>
-                <a:cs typeface="STSong"/>
+                <a:latin typeface="Arial"/>
+                <a:ea typeface="Arial"/>
+                <a:cs typeface="Arial"/>
               </a:defRPr>
             </a:pPr>
             <a:r>
@@ -2061,11 +2061,11 @@
                 <a:solidFill>
                   <a:srgbClr val="102A43"/>
                 </a:solidFill>
-                <a:latin typeface="STSong"/>
-                <a:ea typeface="STSong"/>
-                <a:cs typeface="STSong"/>
-              </a:rPr>
-              <a:t>现场演示流程</a:t>
+                <a:latin typeface="Arial"/>
+                <a:ea typeface="Arial"/>
+                <a:cs typeface="Arial"/>
+              </a:rPr>
+              <a:t>Live Demo Flow</a:t>
             </a:r>
           </a:p>
         </p:txBody>
@@ -2075,7 +2075,7 @@
           <p:cNvPr id="2" name="">
             <a:extLst xmlns:a="http://schemas.openxmlformats.org/drawingml/2006/main">
               <a:ext uri="{FF2B5EF4-FFF2-40B4-BE49-F238E27FC236}">
-                <a16:creationId xmlns:a16="http://schemas.microsoft.com/office/drawing/2014/main" id="{8CAEC4BC-7CD7-4196-AB0D-F5F1D126C435}"/>
+                <a16:creationId xmlns:a16="http://schemas.microsoft.com/office/drawing/2014/main" id="{9124DF49-33F1-480A-831C-E157E9CEC0B6}"/>
               </a:ext>
             </a:extLst>
           </p:cNvPr>
@@ -2106,9 +2106,9 @@
                 <a:solidFill>
                   <a:srgbClr val="0B7285"/>
                 </a:solidFill>
-                <a:latin typeface="STSong"/>
-                <a:ea typeface="STSong"/>
-                <a:cs typeface="STSong"/>
+                <a:latin typeface="Arial"/>
+                <a:ea typeface="Arial"/>
+                <a:cs typeface="Arial"/>
               </a:defRPr>
             </a:pPr>
             <a:r>
@@ -2116,11 +2116,11 @@
                 <a:solidFill>
                   <a:srgbClr val="0B7285"/>
                 </a:solidFill>
-                <a:latin typeface="STSong"/>
-                <a:ea typeface="STSong"/>
-                <a:cs typeface="STSong"/>
-              </a:rPr>
-              <a:t>从安装到回归，展示证据链</a:t>
+                <a:latin typeface="Arial"/>
+                <a:ea typeface="Arial"/>
+                <a:cs typeface="Arial"/>
+              </a:rPr>
+              <a:t>Show the evidence chain from setup to regression</a:t>
             </a:r>
           </a:p>
         </p:txBody>
@@ -2130,7 +2130,7 @@
           <p:cNvPr id="3" name="">
             <a:extLst xmlns:a="http://schemas.openxmlformats.org/drawingml/2006/main">
               <a:ext uri="{FF2B5EF4-FFF2-40B4-BE49-F238E27FC236}">
-                <a16:creationId xmlns:a16="http://schemas.microsoft.com/office/drawing/2014/main" id="{AD2D77E2-C678-4AC9-8C45-4555A8B363A4}"/>
+                <a16:creationId xmlns:a16="http://schemas.microsoft.com/office/drawing/2014/main" id="{90A2F23F-B326-4B0A-9BA7-6D0F7440C50E}"/>
               </a:ext>
             </a:extLst>
           </p:cNvPr>
@@ -2161,9 +2161,9 @@
                 <a:solidFill>
                   <a:srgbClr val="243B53"/>
                 </a:solidFill>
-                <a:latin typeface="STSong"/>
-                <a:ea typeface="STSong"/>
-                <a:cs typeface="STSong"/>
+                <a:latin typeface="Arial"/>
+                <a:ea typeface="Arial"/>
+                <a:cs typeface="Arial"/>
               </a:defRPr>
             </a:pPr>
             <a:r>
@@ -2171,11 +2171,11 @@
                 <a:solidFill>
                   <a:srgbClr val="243B53"/>
                 </a:solidFill>
-                <a:latin typeface="STSong"/>
-                <a:ea typeface="STSong"/>
-                <a:cs typeface="STSong"/>
-              </a:rPr>
-              <a:t>1 进入 module1 并安装依赖</a:t>
+                <a:latin typeface="Arial"/>
+                <a:ea typeface="Arial"/>
+                <a:cs typeface="Arial"/>
+              </a:rPr>
+              <a:t>1. Enter module1 and install dependencies</a:t>
             </a:r>
           </a:p>
           <a:p xmlns:a="http://schemas.openxmlformats.org/drawingml/2006/main">
@@ -2184,9 +2184,9 @@
                 <a:solidFill>
                   <a:srgbClr val="243B53"/>
                 </a:solidFill>
-                <a:latin typeface="STSong"/>
-                <a:ea typeface="STSong"/>
-                <a:cs typeface="STSong"/>
+                <a:latin typeface="Arial"/>
+                <a:ea typeface="Arial"/>
+                <a:cs typeface="Arial"/>
               </a:defRPr>
             </a:pPr>
             <a:r>
@@ -2194,11 +2194,11 @@
                 <a:solidFill>
                   <a:srgbClr val="243B53"/>
                 </a:solidFill>
-                <a:latin typeface="STSong"/>
-                <a:ea typeface="STSong"/>
-                <a:cs typeface="STSong"/>
-              </a:rPr>
-              <a:t>2 运行 pytest，展示 41 passed</a:t>
+                <a:latin typeface="Arial"/>
+                <a:ea typeface="Arial"/>
+                <a:cs typeface="Arial"/>
+              </a:rPr>
+              <a:t>2. Run pytest and show 41 passed</a:t>
             </a:r>
           </a:p>
           <a:p xmlns:a="http://schemas.openxmlformats.org/drawingml/2006/main">
@@ -2207,9 +2207,9 @@
                 <a:solidFill>
                   <a:srgbClr val="243B53"/>
                 </a:solidFill>
-                <a:latin typeface="STSong"/>
-                <a:ea typeface="STSong"/>
-                <a:cs typeface="STSong"/>
+                <a:latin typeface="Arial"/>
+                <a:ea typeface="Arial"/>
+                <a:cs typeface="Arial"/>
               </a:defRPr>
             </a:pPr>
             <a:r>
@@ -2217,11 +2217,11 @@
                 <a:solidFill>
                   <a:srgbClr val="243B53"/>
                 </a:solidFill>
-                <a:latin typeface="STSong"/>
-                <a:ea typeface="STSong"/>
-                <a:cs typeface="STSong"/>
-              </a:rPr>
-              <a:t>3 切换基线复现缺陷</a:t>
+                <a:latin typeface="Arial"/>
+                <a:ea typeface="Arial"/>
+                <a:cs typeface="Arial"/>
+              </a:rPr>
+              <a:t>3. Switch to baseline and reproduce a defect</a:t>
             </a:r>
           </a:p>
           <a:p xmlns:a="http://schemas.openxmlformats.org/drawingml/2006/main">
@@ -2230,9 +2230,9 @@
                 <a:solidFill>
                   <a:srgbClr val="243B53"/>
                 </a:solidFill>
-                <a:latin typeface="STSong"/>
-                <a:ea typeface="STSong"/>
-                <a:cs typeface="STSong"/>
+                <a:latin typeface="Arial"/>
+                <a:ea typeface="Arial"/>
+                <a:cs typeface="Arial"/>
               </a:defRPr>
             </a:pPr>
             <a:r>
@@ -2240,11 +2240,11 @@
                 <a:solidFill>
                   <a:srgbClr val="243B53"/>
                 </a:solidFill>
-                <a:latin typeface="STSong"/>
-                <a:ea typeface="STSong"/>
-                <a:cs typeface="STSong"/>
-              </a:rPr>
-              <a:t>4 应用修复提交并运行回归</a:t>
+                <a:latin typeface="Arial"/>
+                <a:ea typeface="Arial"/>
+                <a:cs typeface="Arial"/>
+              </a:rPr>
+              <a:t>4. Apply the fix and run regression</a:t>
             </a:r>
           </a:p>
           <a:p xmlns:a="http://schemas.openxmlformats.org/drawingml/2006/main">
@@ -2253,9 +2253,9 @@
                 <a:solidFill>
                   <a:srgbClr val="243B53"/>
                 </a:solidFill>
-                <a:latin typeface="STSong"/>
-                <a:ea typeface="STSong"/>
-                <a:cs typeface="STSong"/>
+                <a:latin typeface="Arial"/>
+                <a:ea typeface="Arial"/>
+                <a:cs typeface="Arial"/>
               </a:defRPr>
             </a:pPr>
             <a:r>
@@ -2263,11 +2263,11 @@
                 <a:solidFill>
                   <a:srgbClr val="243B53"/>
                 </a:solidFill>
-                <a:latin typeface="STSong"/>
-                <a:ea typeface="STSong"/>
-                <a:cs typeface="STSong"/>
-              </a:rPr>
-              <a:t>5 打开 Excel、缺陷报告和测试报告</a:t>
+                <a:latin typeface="Arial"/>
+                <a:ea typeface="Arial"/>
+                <a:cs typeface="Arial"/>
+              </a:rPr>
+              <a:t>5. Open the Excel, defect, and test reports</a:t>
             </a:r>
           </a:p>
         </p:txBody>
@@ -2277,7 +2277,7 @@
           <p:cNvPr id="4" name="">
             <a:extLst xmlns:a="http://schemas.openxmlformats.org/drawingml/2006/main">
               <a:ext uri="{FF2B5EF4-FFF2-40B4-BE49-F238E27FC236}">
-                <a16:creationId xmlns:a16="http://schemas.microsoft.com/office/drawing/2014/main" id="{182A49A6-10FC-4F18-A270-972FF85755FB}"/>
+                <a16:creationId xmlns:a16="http://schemas.microsoft.com/office/drawing/2014/main" id="{F46CD4F2-3E4E-49A3-8288-0E9F599A915C}"/>
               </a:ext>
             </a:extLst>
           </p:cNvPr>
@@ -2308,9 +2308,9 @@
                 <a:solidFill>
                   <a:srgbClr val="829AB1"/>
                 </a:solidFill>
-                <a:latin typeface="STSong"/>
-                <a:ea typeface="STSong"/>
-                <a:cs typeface="STSong"/>
+                <a:latin typeface="Arial"/>
+                <a:ea typeface="Arial"/>
+                <a:cs typeface="Arial"/>
               </a:defRPr>
             </a:pPr>
             <a:r>
@@ -2318,9 +2318,9 @@
                 <a:solidFill>
                   <a:srgbClr val="829AB1"/>
                 </a:solidFill>
-                <a:latin typeface="STSong"/>
-                <a:ea typeface="STSong"/>
-                <a:cs typeface="STSong"/>
+                <a:latin typeface="Arial"/>
+                <a:ea typeface="Arial"/>
+                <a:cs typeface="Arial"/>
               </a:rPr>
               <a:t>10</a:t>
             </a:r>
@@ -2330,7 +2330,7 @@
     </p:spTree>
     <p:extLst>
       <p:ext uri="{BB962C8B-B14F-4D97-AF65-F5344CB8AC3E}">
-        <p14:creationId xmlns:p14="http://schemas.microsoft.com/office/powerpoint/2010/main" val="1826371984"/>
+        <p14:creationId xmlns:p14="http://schemas.microsoft.com/office/powerpoint/2010/main" val="2060366717"/>
       </p:ext>
     </p:extLst>
   </p:cSld>
@@ -2361,7 +2361,7 @@
           <p:cNvPr id="5" name="">
             <a:extLst xmlns:a="http://schemas.openxmlformats.org/drawingml/2006/main">
               <a:ext uri="{FF2B5EF4-FFF2-40B4-BE49-F238E27FC236}">
-                <a16:creationId xmlns:a16="http://schemas.microsoft.com/office/drawing/2014/main" id="{CB8EAE4E-840C-4AC3-8A49-451B7965850C}"/>
+                <a16:creationId xmlns:a16="http://schemas.microsoft.com/office/drawing/2014/main" id="{51E2EB67-0955-4F13-A9E8-30314F85DED0}"/>
               </a:ext>
             </a:extLst>
           </p:cNvPr>
@@ -2392,9 +2392,9 @@
                 <a:solidFill>
                   <a:srgbClr val="102A43"/>
                 </a:solidFill>
-                <a:latin typeface="STSong"/>
-                <a:ea typeface="STSong"/>
-                <a:cs typeface="STSong"/>
+                <a:latin typeface="Arial"/>
+                <a:ea typeface="Arial"/>
+                <a:cs typeface="Arial"/>
               </a:defRPr>
             </a:pPr>
             <a:r>
@@ -2402,11 +2402,11 @@
                 <a:solidFill>
                   <a:srgbClr val="102A43"/>
                 </a:solidFill>
-                <a:latin typeface="STSong"/>
-                <a:ea typeface="STSong"/>
-                <a:cs typeface="STSong"/>
-              </a:rPr>
-              <a:t>结论与交付物</a:t>
+                <a:latin typeface="Arial"/>
+                <a:ea typeface="Arial"/>
+                <a:cs typeface="Arial"/>
+              </a:rPr>
+              <a:t>Conclusion and Deliverables</a:t>
             </a:r>
           </a:p>
         </p:txBody>
@@ -2416,7 +2416,7 @@
           <p:cNvPr id="2" name="">
             <a:extLst xmlns:a="http://schemas.openxmlformats.org/drawingml/2006/main">
               <a:ext uri="{FF2B5EF4-FFF2-40B4-BE49-F238E27FC236}">
-                <a16:creationId xmlns:a16="http://schemas.microsoft.com/office/drawing/2014/main" id="{3C3904E8-19AC-460B-9782-56FEB8AAD622}"/>
+                <a16:creationId xmlns:a16="http://schemas.microsoft.com/office/drawing/2014/main" id="{F0E49FF9-9FF7-4FF0-B73B-C9C95F769C70}"/>
               </a:ext>
             </a:extLst>
           </p:cNvPr>
@@ -2447,9 +2447,9 @@
                 <a:solidFill>
                   <a:srgbClr val="0B7285"/>
                 </a:solidFill>
-                <a:latin typeface="STSong"/>
-                <a:ea typeface="STSong"/>
-                <a:cs typeface="STSong"/>
+                <a:latin typeface="Arial"/>
+                <a:ea typeface="Arial"/>
+                <a:cs typeface="Arial"/>
               </a:defRPr>
             </a:pPr>
             <a:r>
@@ -2457,11 +2457,11 @@
                 <a:solidFill>
                   <a:srgbClr val="0B7285"/>
                 </a:solidFill>
-                <a:latin typeface="STSong"/>
-                <a:ea typeface="STSong"/>
-                <a:cs typeface="STSong"/>
-              </a:rPr>
-              <a:t>模块一形成可复现、可追溯的测试实践</a:t>
+                <a:latin typeface="Arial"/>
+                <a:ea typeface="Arial"/>
+                <a:cs typeface="Arial"/>
+              </a:rPr>
+              <a:t>A reproducible and traceable testing practice</a:t>
             </a:r>
           </a:p>
         </p:txBody>
@@ -2471,7 +2471,7 @@
           <p:cNvPr id="3" name="">
             <a:extLst xmlns:a="http://schemas.openxmlformats.org/drawingml/2006/main">
               <a:ext uri="{FF2B5EF4-FFF2-40B4-BE49-F238E27FC236}">
-                <a16:creationId xmlns:a16="http://schemas.microsoft.com/office/drawing/2014/main" id="{648EBD78-69C6-4921-8ACB-4C55E38C2918}"/>
+                <a16:creationId xmlns:a16="http://schemas.microsoft.com/office/drawing/2014/main" id="{5B682873-288E-4021-BBA5-3EE0BE5668A3}"/>
               </a:ext>
             </a:extLst>
           </p:cNvPr>
@@ -2502,9 +2502,9 @@
                 <a:solidFill>
                   <a:srgbClr val="243B53"/>
                 </a:solidFill>
-                <a:latin typeface="STSong"/>
-                <a:ea typeface="STSong"/>
-                <a:cs typeface="STSong"/>
+                <a:latin typeface="Arial"/>
+                <a:ea typeface="Arial"/>
+                <a:cs typeface="Arial"/>
               </a:defRPr>
             </a:pPr>
             <a:r>
@@ -2512,11 +2512,11 @@
                 <a:solidFill>
                   <a:srgbClr val="243B53"/>
                 </a:solidFill>
-                <a:latin typeface="STSong"/>
-                <a:ea typeface="STSong"/>
-                <a:cs typeface="STSong"/>
-              </a:rPr>
-              <a:t>36 条清单与自动化脚本</a:t>
+                <a:latin typeface="Arial"/>
+                <a:ea typeface="Arial"/>
+                <a:cs typeface="Arial"/>
+              </a:rPr>
+              <a:t>36-case Excel checklist and pytest source</a:t>
             </a:r>
           </a:p>
           <a:p xmlns:a="http://schemas.openxmlformats.org/drawingml/2006/main">
@@ -2525,9 +2525,9 @@
                 <a:solidFill>
                   <a:srgbClr val="243B53"/>
                 </a:solidFill>
-                <a:latin typeface="STSong"/>
-                <a:ea typeface="STSong"/>
-                <a:cs typeface="STSong"/>
+                <a:latin typeface="Arial"/>
+                <a:ea typeface="Arial"/>
+                <a:cs typeface="Arial"/>
               </a:defRPr>
             </a:pPr>
             <a:r>
@@ -2535,11 +2535,11 @@
                 <a:solidFill>
                   <a:srgbClr val="243B53"/>
                 </a:solidFill>
-                <a:latin typeface="STSong"/>
-                <a:ea typeface="STSong"/>
-                <a:cs typeface="STSong"/>
-              </a:rPr>
-              <a:t>3 个公开历史缺陷的复现、修复、回归证据</a:t>
+                <a:latin typeface="Arial"/>
+                <a:ea typeface="Arial"/>
+                <a:cs typeface="Arial"/>
+              </a:rPr>
+              <a:t>Three public historical defects with fix evidence</a:t>
             </a:r>
           </a:p>
           <a:p xmlns:a="http://schemas.openxmlformats.org/drawingml/2006/main">
@@ -2548,9 +2548,9 @@
                 <a:solidFill>
                   <a:srgbClr val="243B53"/>
                 </a:solidFill>
-                <a:latin typeface="STSong"/>
-                <a:ea typeface="STSong"/>
-                <a:cs typeface="STSong"/>
+                <a:latin typeface="Arial"/>
+                <a:ea typeface="Arial"/>
+                <a:cs typeface="Arial"/>
               </a:defRPr>
             </a:pPr>
             <a:r>
@@ -2558,11 +2558,11 @@
                 <a:solidFill>
                   <a:srgbClr val="243B53"/>
                 </a:solidFill>
-                <a:latin typeface="STSong"/>
-                <a:ea typeface="STSong"/>
-                <a:cs typeface="STSong"/>
-              </a:rPr>
-              <a:t>附录1、附录2、附录3 与 README</a:t>
+                <a:latin typeface="Arial"/>
+                <a:ea typeface="Arial"/>
+                <a:cs typeface="Arial"/>
+              </a:rPr>
+              <a:t>Appendix 1, Appendix 2, Appendix 3, and README</a:t>
             </a:r>
           </a:p>
           <a:p xmlns:a="http://schemas.openxmlformats.org/drawingml/2006/main">
@@ -2571,9 +2571,9 @@
                 <a:solidFill>
                   <a:srgbClr val="243B53"/>
                 </a:solidFill>
-                <a:latin typeface="STSong"/>
-                <a:ea typeface="STSong"/>
-                <a:cs typeface="STSong"/>
+                <a:latin typeface="Arial"/>
+                <a:ea typeface="Arial"/>
+                <a:cs typeface="Arial"/>
               </a:defRPr>
             </a:pPr>
             <a:r>
@@ -2581,11 +2581,11 @@
                 <a:solidFill>
                   <a:srgbClr val="243B53"/>
                 </a:solidFill>
-                <a:latin typeface="STSong"/>
-                <a:ea typeface="STSong"/>
-                <a:cs typeface="STSong"/>
-              </a:rPr>
-              <a:t>演示入口：module1/presentation/演示视频脚本.md</a:t>
+                <a:latin typeface="Arial"/>
+                <a:ea typeface="Arial"/>
+                <a:cs typeface="Arial"/>
+              </a:rPr>
+              <a:t>Video guide: 演示视频脚本.md</a:t>
             </a:r>
           </a:p>
         </p:txBody>
@@ -2595,7 +2595,7 @@
           <p:cNvPr id="4" name="">
             <a:extLst xmlns:a="http://schemas.openxmlformats.org/drawingml/2006/main">
               <a:ext uri="{FF2B5EF4-FFF2-40B4-BE49-F238E27FC236}">
-                <a16:creationId xmlns:a16="http://schemas.microsoft.com/office/drawing/2014/main" id="{6B75542A-3913-4B2D-819D-5E582895A115}"/>
+                <a16:creationId xmlns:a16="http://schemas.microsoft.com/office/drawing/2014/main" id="{10189303-A47F-47DA-918D-CE01D22FE7EB}"/>
               </a:ext>
             </a:extLst>
           </p:cNvPr>
@@ -2626,9 +2626,9 @@
                 <a:solidFill>
                   <a:srgbClr val="829AB1"/>
                 </a:solidFill>
-                <a:latin typeface="STSong"/>
-                <a:ea typeface="STSong"/>
-                <a:cs typeface="STSong"/>
+                <a:latin typeface="Arial"/>
+                <a:ea typeface="Arial"/>
+                <a:cs typeface="Arial"/>
               </a:defRPr>
             </a:pPr>
             <a:r>
@@ -2636,9 +2636,9 @@
                 <a:solidFill>
                   <a:srgbClr val="829AB1"/>
                 </a:solidFill>
-                <a:latin typeface="STSong"/>
-                <a:ea typeface="STSong"/>
-                <a:cs typeface="STSong"/>
+                <a:latin typeface="Arial"/>
+                <a:ea typeface="Arial"/>
+                <a:cs typeface="Arial"/>
               </a:rPr>
               <a:t>11</a:t>
             </a:r>
@@ -2648,7 +2648,7 @@
     </p:spTree>
     <p:extLst>
       <p:ext uri="{BB962C8B-B14F-4D97-AF65-F5344CB8AC3E}">
-        <p14:creationId xmlns:p14="http://schemas.microsoft.com/office/powerpoint/2010/main" val="1763149052"/>
+        <p14:creationId xmlns:p14="http://schemas.microsoft.com/office/powerpoint/2010/main" val="1326077962"/>
       </p:ext>
     </p:extLst>
   </p:cSld>
@@ -2679,7 +2679,7 @@
           <p:cNvPr id="5" name="">
             <a:extLst xmlns:a="http://schemas.openxmlformats.org/drawingml/2006/main">
               <a:ext uri="{FF2B5EF4-FFF2-40B4-BE49-F238E27FC236}">
-                <a16:creationId xmlns:a16="http://schemas.microsoft.com/office/drawing/2014/main" id="{6D0900A0-8ACB-41B4-81D6-136DBA9E875B}"/>
+                <a16:creationId xmlns:a16="http://schemas.microsoft.com/office/drawing/2014/main" id="{68618BF8-8B97-4128-9FBA-315B7C5C003A}"/>
               </a:ext>
             </a:extLst>
           </p:cNvPr>
@@ -2710,9 +2710,9 @@
                 <a:solidFill>
                   <a:srgbClr val="102A43"/>
                 </a:solidFill>
-                <a:latin typeface="STSong"/>
-                <a:ea typeface="STSong"/>
-                <a:cs typeface="STSong"/>
+                <a:latin typeface="Arial"/>
+                <a:ea typeface="Arial"/>
+                <a:cs typeface="Arial"/>
               </a:defRPr>
             </a:pPr>
             <a:r>
@@ -2720,11 +2720,11 @@
                 <a:solidFill>
                   <a:srgbClr val="102A43"/>
                 </a:solidFill>
-                <a:latin typeface="STSong"/>
-                <a:ea typeface="STSong"/>
-                <a:cs typeface="STSong"/>
-              </a:rPr>
-              <a:t>被测对象：croniter</a:t>
+                <a:latin typeface="Arial"/>
+                <a:ea typeface="Arial"/>
+                <a:cs typeface="Arial"/>
+              </a:rPr>
+              <a:t>System Under Test: croniter</a:t>
             </a:r>
           </a:p>
         </p:txBody>
@@ -2734,7 +2734,7 @@
           <p:cNvPr id="2" name="">
             <a:extLst xmlns:a="http://schemas.openxmlformats.org/drawingml/2006/main">
               <a:ext uri="{FF2B5EF4-FFF2-40B4-BE49-F238E27FC236}">
-                <a16:creationId xmlns:a16="http://schemas.microsoft.com/office/drawing/2014/main" id="{9F193EE4-10EB-448D-AD58-FA7C3A887127}"/>
+                <a16:creationId xmlns:a16="http://schemas.microsoft.com/office/drawing/2014/main" id="{0A519FA8-A5CA-477B-8D3D-58FF42446519}"/>
               </a:ext>
             </a:extLst>
           </p:cNvPr>
@@ -2765,9 +2765,9 @@
                 <a:solidFill>
                   <a:srgbClr val="0B7285"/>
                 </a:solidFill>
-                <a:latin typeface="STSong"/>
-                <a:ea typeface="STSong"/>
-                <a:cs typeface="STSong"/>
+                <a:latin typeface="Arial"/>
+                <a:ea typeface="Arial"/>
+                <a:cs typeface="Arial"/>
               </a:defRPr>
             </a:pPr>
             <a:r>
@@ -2775,11 +2775,11 @@
                 <a:solidFill>
                   <a:srgbClr val="0B7285"/>
                 </a:solidFill>
-                <a:latin typeface="STSong"/>
-                <a:ea typeface="STSong"/>
-                <a:cs typeface="STSong"/>
-              </a:rPr>
-              <a:t>Python cron 表达式迭代库</a:t>
+                <a:latin typeface="Arial"/>
+                <a:ea typeface="Arial"/>
+                <a:cs typeface="Arial"/>
+              </a:rPr>
+              <a:t>Python cron expression parser and iterator</a:t>
             </a:r>
           </a:p>
         </p:txBody>
@@ -2789,7 +2789,7 @@
           <p:cNvPr id="3" name="">
             <a:extLst xmlns:a="http://schemas.openxmlformats.org/drawingml/2006/main">
               <a:ext uri="{FF2B5EF4-FFF2-40B4-BE49-F238E27FC236}">
-                <a16:creationId xmlns:a16="http://schemas.microsoft.com/office/drawing/2014/main" id="{05288AA8-4068-4233-B6C8-5CF8E8143C3F}"/>
+                <a16:creationId xmlns:a16="http://schemas.microsoft.com/office/drawing/2014/main" id="{DF2B9954-8235-4CAD-B914-FB06F7E94867}"/>
               </a:ext>
             </a:extLst>
           </p:cNvPr>
@@ -2820,9 +2820,9 @@
                 <a:solidFill>
                   <a:srgbClr val="243B53"/>
                 </a:solidFill>
-                <a:latin typeface="STSong"/>
-                <a:ea typeface="STSong"/>
-                <a:cs typeface="STSong"/>
+                <a:latin typeface="Arial"/>
+                <a:ea typeface="Arial"/>
+                <a:cs typeface="Arial"/>
               </a:defRPr>
             </a:pPr>
             <a:r>
@@ -2830,11 +2830,11 @@
                 <a:solidFill>
                   <a:srgbClr val="243B53"/>
                 </a:solidFill>
-                <a:latin typeface="STSong"/>
-                <a:ea typeface="STSong"/>
-                <a:cs typeface="STSong"/>
-              </a:rPr>
-              <a:t>核心接口：croniter()、get_next()、get_prev()、match_range()、croniter_range()</a:t>
+                <a:latin typeface="Arial"/>
+                <a:ea typeface="Arial"/>
+                <a:cs typeface="Arial"/>
+              </a:rPr>
+              <a:t>Core APIs: croniter(), get_next(), get_prev(), match_range(), croniter_range()</a:t>
             </a:r>
           </a:p>
           <a:p xmlns:a="http://schemas.openxmlformats.org/drawingml/2006/main">
@@ -2843,9 +2843,9 @@
                 <a:solidFill>
                   <a:srgbClr val="243B53"/>
                 </a:solidFill>
-                <a:latin typeface="STSong"/>
-                <a:ea typeface="STSong"/>
-                <a:cs typeface="STSong"/>
+                <a:latin typeface="Arial"/>
+                <a:ea typeface="Arial"/>
+                <a:cs typeface="Arial"/>
               </a:defRPr>
             </a:pPr>
             <a:r>
@@ -2853,11 +2853,11 @@
                 <a:solidFill>
                   <a:srgbClr val="243B53"/>
                 </a:solidFill>
-                <a:latin typeface="STSong"/>
-                <a:ea typeface="STSong"/>
-                <a:cs typeface="STSong"/>
-              </a:rPr>
-              <a:t>基线：上游 6.2.2；缺陷修复在本地分支完成</a:t>
+                <a:latin typeface="Arial"/>
+                <a:ea typeface="Arial"/>
+                <a:cs typeface="Arial"/>
+              </a:rPr>
+              <a:t>Baseline: upstream 6.2.2; fixes kept on local branch</a:t>
             </a:r>
           </a:p>
         </p:txBody>
@@ -2867,7 +2867,7 @@
           <p:cNvPr id="4" name="">
             <a:extLst xmlns:a="http://schemas.openxmlformats.org/drawingml/2006/main">
               <a:ext uri="{FF2B5EF4-FFF2-40B4-BE49-F238E27FC236}">
-                <a16:creationId xmlns:a16="http://schemas.microsoft.com/office/drawing/2014/main" id="{96913141-1C1A-4F74-8409-0ED4121B1021}"/>
+                <a16:creationId xmlns:a16="http://schemas.microsoft.com/office/drawing/2014/main" id="{F28F6D23-71B6-48E6-938B-E0C62C6D8F1B}"/>
               </a:ext>
             </a:extLst>
           </p:cNvPr>
@@ -2898,9 +2898,9 @@
                 <a:solidFill>
                   <a:srgbClr val="829AB1"/>
                 </a:solidFill>
-                <a:latin typeface="STSong"/>
-                <a:ea typeface="STSong"/>
-                <a:cs typeface="STSong"/>
+                <a:latin typeface="Arial"/>
+                <a:ea typeface="Arial"/>
+                <a:cs typeface="Arial"/>
               </a:defRPr>
             </a:pPr>
             <a:r>
@@ -2908,9 +2908,9 @@
                 <a:solidFill>
                   <a:srgbClr val="829AB1"/>
                 </a:solidFill>
-                <a:latin typeface="STSong"/>
-                <a:ea typeface="STSong"/>
-                <a:cs typeface="STSong"/>
+                <a:latin typeface="Arial"/>
+                <a:ea typeface="Arial"/>
+                <a:cs typeface="Arial"/>
               </a:rPr>
               <a:t>02</a:t>
             </a:r>
@@ -2920,7 +2920,7 @@
     </p:spTree>
     <p:extLst>
       <p:ext uri="{BB962C8B-B14F-4D97-AF65-F5344CB8AC3E}">
-        <p14:creationId xmlns:p14="http://schemas.microsoft.com/office/powerpoint/2010/main" val="1485338613"/>
+        <p14:creationId xmlns:p14="http://schemas.microsoft.com/office/powerpoint/2010/main" val="246053630"/>
       </p:ext>
     </p:extLst>
   </p:cSld>
@@ -2951,7 +2951,7 @@
           <p:cNvPr id="5" name="">
             <a:extLst xmlns:a="http://schemas.openxmlformats.org/drawingml/2006/main">
               <a:ext uri="{FF2B5EF4-FFF2-40B4-BE49-F238E27FC236}">
-                <a16:creationId xmlns:a16="http://schemas.microsoft.com/office/drawing/2014/main" id="{C92CA37C-B3C4-40B1-AFF1-7C0DF42F2235}"/>
+                <a16:creationId xmlns:a16="http://schemas.microsoft.com/office/drawing/2014/main" id="{D81F0C6F-8CDE-4451-A70C-85F97AFB1572}"/>
               </a:ext>
             </a:extLst>
           </p:cNvPr>
@@ -2982,9 +2982,9 @@
                 <a:solidFill>
                   <a:srgbClr val="102A43"/>
                 </a:solidFill>
-                <a:latin typeface="STSong"/>
-                <a:ea typeface="STSong"/>
-                <a:cs typeface="STSong"/>
+                <a:latin typeface="Arial"/>
+                <a:ea typeface="Arial"/>
+                <a:cs typeface="Arial"/>
               </a:defRPr>
             </a:pPr>
             <a:r>
@@ -2992,11 +2992,11 @@
                 <a:solidFill>
                   <a:srgbClr val="102A43"/>
                 </a:solidFill>
-                <a:latin typeface="STSong"/>
-                <a:ea typeface="STSong"/>
-                <a:cs typeface="STSong"/>
-              </a:rPr>
-              <a:t>风险地图</a:t>
+                <a:latin typeface="Arial"/>
+                <a:ea typeface="Arial"/>
+                <a:cs typeface="Arial"/>
+              </a:rPr>
+              <a:t>Risk Map</a:t>
             </a:r>
           </a:p>
         </p:txBody>
@@ -3006,7 +3006,7 @@
           <p:cNvPr id="2" name="">
             <a:extLst xmlns:a="http://schemas.openxmlformats.org/drawingml/2006/main">
               <a:ext uri="{FF2B5EF4-FFF2-40B4-BE49-F238E27FC236}">
-                <a16:creationId xmlns:a16="http://schemas.microsoft.com/office/drawing/2014/main" id="{7EAEA9DE-83B1-4B0B-839F-8F89D3E21331}"/>
+                <a16:creationId xmlns:a16="http://schemas.microsoft.com/office/drawing/2014/main" id="{520B0051-06AB-41D5-8E1E-F30596797E54}"/>
               </a:ext>
             </a:extLst>
           </p:cNvPr>
@@ -3037,9 +3037,9 @@
                 <a:solidFill>
                   <a:srgbClr val="0B7285"/>
                 </a:solidFill>
-                <a:latin typeface="STSong"/>
-                <a:ea typeface="STSong"/>
-                <a:cs typeface="STSong"/>
+                <a:latin typeface="Arial"/>
+                <a:ea typeface="Arial"/>
+                <a:cs typeface="Arial"/>
               </a:defRPr>
             </a:pPr>
             <a:r>
@@ -3047,11 +3047,11 @@
                 <a:solidFill>
                   <a:srgbClr val="0B7285"/>
                 </a:solidFill>
-                <a:latin typeface="STSong"/>
-                <a:ea typeface="STSong"/>
-                <a:cs typeface="STSong"/>
-              </a:rPr>
-              <a:t>时间表达式的错误会直接改变任务触发时刻</a:t>
+                <a:latin typeface="Arial"/>
+                <a:ea typeface="Arial"/>
+                <a:cs typeface="Arial"/>
+              </a:rPr>
+              <a:t>Scheduling errors change job trigger times</a:t>
             </a:r>
           </a:p>
         </p:txBody>
@@ -3061,7 +3061,7 @@
           <p:cNvPr id="3" name="">
             <a:extLst xmlns:a="http://schemas.openxmlformats.org/drawingml/2006/main">
               <a:ext uri="{FF2B5EF4-FFF2-40B4-BE49-F238E27FC236}">
-                <a16:creationId xmlns:a16="http://schemas.microsoft.com/office/drawing/2014/main" id="{7AC311C1-40A0-40AD-B4F0-0B1B369F9F37}"/>
+                <a16:creationId xmlns:a16="http://schemas.microsoft.com/office/drawing/2014/main" id="{A5A7FCE5-F84E-4D03-A87D-1CB4E6C9E307}"/>
               </a:ext>
             </a:extLst>
           </p:cNvPr>
@@ -3092,9 +3092,9 @@
                 <a:solidFill>
                   <a:srgbClr val="243B53"/>
                 </a:solidFill>
-                <a:latin typeface="STSong"/>
-                <a:ea typeface="STSong"/>
-                <a:cs typeface="STSong"/>
+                <a:latin typeface="Arial"/>
+                <a:ea typeface="Arial"/>
+                <a:cs typeface="Arial"/>
               </a:defRPr>
             </a:pPr>
             <a:r>
@@ -3102,11 +3102,11 @@
                 <a:solidFill>
                   <a:srgbClr val="243B53"/>
                 </a:solidFill>
-                <a:latin typeface="STSong"/>
-                <a:ea typeface="STSong"/>
-                <a:cs typeface="STSong"/>
-              </a:rPr>
-              <a:t>解析输入：字段数量、范围、步长、非法值</a:t>
+                <a:latin typeface="Arial"/>
+                <a:ea typeface="Arial"/>
+                <a:cs typeface="Arial"/>
+              </a:rPr>
+              <a:t>Input parsing: field count, ranges, steps, invalid values</a:t>
             </a:r>
           </a:p>
           <a:p xmlns:a="http://schemas.openxmlformats.org/drawingml/2006/main">
@@ -3115,9 +3115,9 @@
                 <a:solidFill>
                   <a:srgbClr val="243B53"/>
                 </a:solidFill>
-                <a:latin typeface="STSong"/>
-                <a:ea typeface="STSong"/>
-                <a:cs typeface="STSong"/>
+                <a:latin typeface="Arial"/>
+                <a:ea typeface="Arial"/>
+                <a:cs typeface="Arial"/>
               </a:defRPr>
             </a:pPr>
             <a:r>
@@ -3125,11 +3125,11 @@
                 <a:solidFill>
                   <a:srgbClr val="243B53"/>
                 </a:solidFill>
-                <a:latin typeface="STSong"/>
-                <a:ea typeface="STSong"/>
-                <a:cs typeface="STSong"/>
-              </a:rPr>
-              <a:t>时间边界：月末、闰年、跨年、星期日</a:t>
+                <a:latin typeface="Arial"/>
+                <a:ea typeface="Arial"/>
+                <a:cs typeface="Arial"/>
+              </a:rPr>
+              <a:t>Time boundaries: month end, leap year, year rollover, Sunday</a:t>
             </a:r>
           </a:p>
           <a:p xmlns:a="http://schemas.openxmlformats.org/drawingml/2006/main">
@@ -3138,9 +3138,9 @@
                 <a:solidFill>
                   <a:srgbClr val="243B53"/>
                 </a:solidFill>
-                <a:latin typeface="STSong"/>
-                <a:ea typeface="STSong"/>
-                <a:cs typeface="STSong"/>
+                <a:latin typeface="Arial"/>
+                <a:ea typeface="Arial"/>
+                <a:cs typeface="Arial"/>
               </a:defRPr>
             </a:pPr>
             <a:r>
@@ -3148,11 +3148,11 @@
                 <a:solidFill>
                   <a:srgbClr val="243B53"/>
                 </a:solidFill>
-                <a:latin typeface="STSong"/>
-                <a:ea typeface="STSong"/>
-                <a:cs typeface="STSong"/>
-              </a:rPr>
-              <a:t>状态行为：连续 next/prev、区间枚举、时区感知 datetime</a:t>
+                <a:latin typeface="Arial"/>
+                <a:ea typeface="Arial"/>
+                <a:cs typeface="Arial"/>
+              </a:rPr>
+              <a:t>State behavior: repeated next/prev, range iteration, timezone-aware datetime</a:t>
             </a:r>
           </a:p>
         </p:txBody>
@@ -3162,7 +3162,7 @@
           <p:cNvPr id="4" name="">
             <a:extLst xmlns:a="http://schemas.openxmlformats.org/drawingml/2006/main">
               <a:ext uri="{FF2B5EF4-FFF2-40B4-BE49-F238E27FC236}">
-                <a16:creationId xmlns:a16="http://schemas.microsoft.com/office/drawing/2014/main" id="{9ECBBC9F-83BD-409C-9450-24A6E43FF08F}"/>
+                <a16:creationId xmlns:a16="http://schemas.microsoft.com/office/drawing/2014/main" id="{3CD32F73-9AB5-481F-81E0-08BFCA9D07BA}"/>
               </a:ext>
             </a:extLst>
           </p:cNvPr>
@@ -3193,9 +3193,9 @@
                 <a:solidFill>
                   <a:srgbClr val="829AB1"/>
                 </a:solidFill>
-                <a:latin typeface="STSong"/>
-                <a:ea typeface="STSong"/>
-                <a:cs typeface="STSong"/>
+                <a:latin typeface="Arial"/>
+                <a:ea typeface="Arial"/>
+                <a:cs typeface="Arial"/>
               </a:defRPr>
             </a:pPr>
             <a:r>
@@ -3203,9 +3203,9 @@
                 <a:solidFill>
                   <a:srgbClr val="829AB1"/>
                 </a:solidFill>
-                <a:latin typeface="STSong"/>
-                <a:ea typeface="STSong"/>
-                <a:cs typeface="STSong"/>
+                <a:latin typeface="Arial"/>
+                <a:ea typeface="Arial"/>
+                <a:cs typeface="Arial"/>
               </a:rPr>
               <a:t>03</a:t>
             </a:r>
@@ -3215,7 +3215,7 @@
     </p:spTree>
     <p:extLst>
       <p:ext uri="{BB962C8B-B14F-4D97-AF65-F5344CB8AC3E}">
-        <p14:creationId xmlns:p14="http://schemas.microsoft.com/office/powerpoint/2010/main" val="1778665780"/>
+        <p14:creationId xmlns:p14="http://schemas.microsoft.com/office/powerpoint/2010/main" val="581937266"/>
       </p:ext>
     </p:extLst>
   </p:cSld>
@@ -3246,7 +3246,7 @@
           <p:cNvPr id="5" name="">
             <a:extLst xmlns:a="http://schemas.openxmlformats.org/drawingml/2006/main">
               <a:ext uri="{FF2B5EF4-FFF2-40B4-BE49-F238E27FC236}">
-                <a16:creationId xmlns:a16="http://schemas.microsoft.com/office/drawing/2014/main" id="{1F26227D-2E76-4FB9-B4C6-7E29DEC3A2A3}"/>
+                <a16:creationId xmlns:a16="http://schemas.microsoft.com/office/drawing/2014/main" id="{47852A50-CE62-4013-B947-010735CE7F7B}"/>
               </a:ext>
             </a:extLst>
           </p:cNvPr>
@@ -3277,9 +3277,9 @@
                 <a:solidFill>
                   <a:srgbClr val="102A43"/>
                 </a:solidFill>
-                <a:latin typeface="STSong"/>
-                <a:ea typeface="STSong"/>
-                <a:cs typeface="STSong"/>
+                <a:latin typeface="Arial"/>
+                <a:ea typeface="Arial"/>
+                <a:cs typeface="Arial"/>
               </a:defRPr>
             </a:pPr>
             <a:r>
@@ -3287,11 +3287,11 @@
                 <a:solidFill>
                   <a:srgbClr val="102A43"/>
                 </a:solidFill>
-                <a:latin typeface="STSong"/>
-                <a:ea typeface="STSong"/>
-                <a:cs typeface="STSong"/>
-              </a:rPr>
-              <a:t>测试策略</a:t>
+                <a:latin typeface="Arial"/>
+                <a:ea typeface="Arial"/>
+                <a:cs typeface="Arial"/>
+              </a:rPr>
+              <a:t>Test Strategy</a:t>
             </a:r>
           </a:p>
         </p:txBody>
@@ -3301,7 +3301,7 @@
           <p:cNvPr id="2" name="">
             <a:extLst xmlns:a="http://schemas.openxmlformats.org/drawingml/2006/main">
               <a:ext uri="{FF2B5EF4-FFF2-40B4-BE49-F238E27FC236}">
-                <a16:creationId xmlns:a16="http://schemas.microsoft.com/office/drawing/2014/main" id="{DA921F73-F227-4227-9E82-F87C78808AA8}"/>
+                <a16:creationId xmlns:a16="http://schemas.microsoft.com/office/drawing/2014/main" id="{33298A9C-274D-425C-A4ED-155BC9D0353A}"/>
               </a:ext>
             </a:extLst>
           </p:cNvPr>
@@ -3332,9 +3332,9 @@
                 <a:solidFill>
                   <a:srgbClr val="0B7285"/>
                 </a:solidFill>
-                <a:latin typeface="STSong"/>
-                <a:ea typeface="STSong"/>
-                <a:cs typeface="STSong"/>
+                <a:latin typeface="Arial"/>
+                <a:ea typeface="Arial"/>
+                <a:cs typeface="Arial"/>
               </a:defRPr>
             </a:pPr>
             <a:r>
@@ -3342,11 +3342,11 @@
                 <a:solidFill>
                   <a:srgbClr val="0B7285"/>
                 </a:solidFill>
-                <a:latin typeface="STSong"/>
-                <a:ea typeface="STSong"/>
-                <a:cs typeface="STSong"/>
-              </a:rPr>
-              <a:t>用例设计覆盖输入类别与时间边界</a:t>
+                <a:latin typeface="Arial"/>
+                <a:ea typeface="Arial"/>
+                <a:cs typeface="Arial"/>
+              </a:rPr>
+              <a:t>Equivalence classes plus boundary and scenario testing</a:t>
             </a:r>
           </a:p>
         </p:txBody>
@@ -3356,7 +3356,7 @@
           <p:cNvPr id="3" name="">
             <a:extLst xmlns:a="http://schemas.openxmlformats.org/drawingml/2006/main">
               <a:ext uri="{FF2B5EF4-FFF2-40B4-BE49-F238E27FC236}">
-                <a16:creationId xmlns:a16="http://schemas.microsoft.com/office/drawing/2014/main" id="{4E86DBCA-FAD8-4148-B6FA-E894C1A5462F}"/>
+                <a16:creationId xmlns:a16="http://schemas.microsoft.com/office/drawing/2014/main" id="{2447F9D3-9EFE-427C-91B5-8F8A4CDD7668}"/>
               </a:ext>
             </a:extLst>
           </p:cNvPr>
@@ -3387,9 +3387,9 @@
                 <a:solidFill>
                   <a:srgbClr val="243B53"/>
                 </a:solidFill>
-                <a:latin typeface="STSong"/>
-                <a:ea typeface="STSong"/>
-                <a:cs typeface="STSong"/>
+                <a:latin typeface="Arial"/>
+                <a:ea typeface="Arial"/>
+                <a:cs typeface="Arial"/>
               </a:defRPr>
             </a:pPr>
             <a:r>
@@ -3397,11 +3397,11 @@
                 <a:solidFill>
                   <a:srgbClr val="243B53"/>
                 </a:solidFill>
-                <a:latin typeface="STSong"/>
-                <a:ea typeface="STSong"/>
-                <a:cs typeface="STSong"/>
-              </a:rPr>
-              <a:t>等价类：12 条</a:t>
+                <a:latin typeface="Arial"/>
+                <a:ea typeface="Arial"/>
+                <a:cs typeface="Arial"/>
+              </a:rPr>
+              <a:t>Equivalence classes: 12 cases</a:t>
             </a:r>
           </a:p>
           <a:p xmlns:a="http://schemas.openxmlformats.org/drawingml/2006/main">
@@ -3410,9 +3410,9 @@
                 <a:solidFill>
                   <a:srgbClr val="243B53"/>
                 </a:solidFill>
-                <a:latin typeface="STSong"/>
-                <a:ea typeface="STSong"/>
-                <a:cs typeface="STSong"/>
+                <a:latin typeface="Arial"/>
+                <a:ea typeface="Arial"/>
+                <a:cs typeface="Arial"/>
               </a:defRPr>
             </a:pPr>
             <a:r>
@@ -3420,11 +3420,11 @@
                 <a:solidFill>
                   <a:srgbClr val="243B53"/>
                 </a:solidFill>
-                <a:latin typeface="STSong"/>
-                <a:ea typeface="STSong"/>
-                <a:cs typeface="STSong"/>
-              </a:rPr>
-              <a:t>边界值：12 条</a:t>
+                <a:latin typeface="Arial"/>
+                <a:ea typeface="Arial"/>
+                <a:cs typeface="Arial"/>
+              </a:rPr>
+              <a:t>Boundary values: 12 cases</a:t>
             </a:r>
           </a:p>
           <a:p xmlns:a="http://schemas.openxmlformats.org/drawingml/2006/main">
@@ -3433,9 +3433,9 @@
                 <a:solidFill>
                   <a:srgbClr val="243B53"/>
                 </a:solidFill>
-                <a:latin typeface="STSong"/>
-                <a:ea typeface="STSong"/>
-                <a:cs typeface="STSong"/>
+                <a:latin typeface="Arial"/>
+                <a:ea typeface="Arial"/>
+                <a:cs typeface="Arial"/>
               </a:defRPr>
             </a:pPr>
             <a:r>
@@ -3443,11 +3443,11 @@
                 <a:solidFill>
                   <a:srgbClr val="243B53"/>
                 </a:solidFill>
-                <a:latin typeface="STSong"/>
-                <a:ea typeface="STSong"/>
-                <a:cs typeface="STSong"/>
-              </a:rPr>
-              <a:t>场景与状态转换：8 条</a:t>
+                <a:latin typeface="Arial"/>
+                <a:ea typeface="Arial"/>
+                <a:cs typeface="Arial"/>
+              </a:rPr>
+              <a:t>Scenarios and state transitions: 8 cases</a:t>
             </a:r>
           </a:p>
           <a:p xmlns:a="http://schemas.openxmlformats.org/drawingml/2006/main">
@@ -3456,9 +3456,9 @@
                 <a:solidFill>
                   <a:srgbClr val="243B53"/>
                 </a:solidFill>
-                <a:latin typeface="STSong"/>
-                <a:ea typeface="STSong"/>
-                <a:cs typeface="STSong"/>
+                <a:latin typeface="Arial"/>
+                <a:ea typeface="Arial"/>
+                <a:cs typeface="Arial"/>
               </a:defRPr>
             </a:pPr>
             <a:r>
@@ -3466,11 +3466,11 @@
                 <a:solidFill>
                   <a:srgbClr val="243B53"/>
                 </a:solidFill>
-                <a:latin typeface="STSong"/>
-                <a:ea typeface="STSong"/>
-                <a:cs typeface="STSong"/>
-              </a:rPr>
-              <a:t>异常与回归：4 条</a:t>
+                <a:latin typeface="Arial"/>
+                <a:ea typeface="Arial"/>
+                <a:cs typeface="Arial"/>
+              </a:rPr>
+              <a:t>Exception and regression: 4 cases</a:t>
             </a:r>
           </a:p>
           <a:p xmlns:a="http://schemas.openxmlformats.org/drawingml/2006/main">
@@ -3479,9 +3479,9 @@
                 <a:solidFill>
                   <a:srgbClr val="243B53"/>
                 </a:solidFill>
-                <a:latin typeface="STSong"/>
-                <a:ea typeface="STSong"/>
-                <a:cs typeface="STSong"/>
+                <a:latin typeface="Arial"/>
+                <a:ea typeface="Arial"/>
+                <a:cs typeface="Arial"/>
               </a:defRPr>
             </a:pPr>
             <a:r>
@@ -3489,11 +3489,11 @@
                 <a:solidFill>
                   <a:srgbClr val="243B53"/>
                 </a:solidFill>
-                <a:latin typeface="STSong"/>
-                <a:ea typeface="STSong"/>
-                <a:cs typeface="STSong"/>
-              </a:rPr>
-              <a:t>共 36 条，自动化执行比例超过 80%</a:t>
+                <a:latin typeface="Arial"/>
+                <a:ea typeface="Arial"/>
+                <a:cs typeface="Arial"/>
+              </a:rPr>
+              <a:t>Total: 36 cases; automation ratio over 80 percent</a:t>
             </a:r>
           </a:p>
         </p:txBody>
@@ -3503,7 +3503,7 @@
           <p:cNvPr id="4" name="">
             <a:extLst xmlns:a="http://schemas.openxmlformats.org/drawingml/2006/main">
               <a:ext uri="{FF2B5EF4-FFF2-40B4-BE49-F238E27FC236}">
-                <a16:creationId xmlns:a16="http://schemas.microsoft.com/office/drawing/2014/main" id="{B2CD6400-3102-4495-B7E5-18925ADD0AD5}"/>
+                <a16:creationId xmlns:a16="http://schemas.microsoft.com/office/drawing/2014/main" id="{B57A9BA7-2411-40CC-BA99-7AF2C24725E5}"/>
               </a:ext>
             </a:extLst>
           </p:cNvPr>
@@ -3534,9 +3534,9 @@
                 <a:solidFill>
                   <a:srgbClr val="829AB1"/>
                 </a:solidFill>
-                <a:latin typeface="STSong"/>
-                <a:ea typeface="STSong"/>
-                <a:cs typeface="STSong"/>
+                <a:latin typeface="Arial"/>
+                <a:ea typeface="Arial"/>
+                <a:cs typeface="Arial"/>
               </a:defRPr>
             </a:pPr>
             <a:r>
@@ -3544,9 +3544,9 @@
                 <a:solidFill>
                   <a:srgbClr val="829AB1"/>
                 </a:solidFill>
-                <a:latin typeface="STSong"/>
-                <a:ea typeface="STSong"/>
-                <a:cs typeface="STSong"/>
+                <a:latin typeface="Arial"/>
+                <a:ea typeface="Arial"/>
+                <a:cs typeface="Arial"/>
               </a:rPr>
               <a:t>04</a:t>
             </a:r>
@@ -3556,7 +3556,7 @@
     </p:spTree>
     <p:extLst>
       <p:ext uri="{BB962C8B-B14F-4D97-AF65-F5344CB8AC3E}">
-        <p14:creationId xmlns:p14="http://schemas.microsoft.com/office/powerpoint/2010/main" val="2133793946"/>
+        <p14:creationId xmlns:p14="http://schemas.microsoft.com/office/powerpoint/2010/main" val="1551323616"/>
       </p:ext>
     </p:extLst>
   </p:cSld>
@@ -3587,7 +3587,7 @@
           <p:cNvPr id="5" name="">
             <a:extLst xmlns:a="http://schemas.openxmlformats.org/drawingml/2006/main">
               <a:ext uri="{FF2B5EF4-FFF2-40B4-BE49-F238E27FC236}">
-                <a16:creationId xmlns:a16="http://schemas.microsoft.com/office/drawing/2014/main" id="{5029BEF9-747E-4664-B870-D1F4331F8342}"/>
+                <a16:creationId xmlns:a16="http://schemas.microsoft.com/office/drawing/2014/main" id="{116FCC22-83AB-44EE-8D34-31B04C520167}"/>
               </a:ext>
             </a:extLst>
           </p:cNvPr>
@@ -3618,9 +3618,9 @@
                 <a:solidFill>
                   <a:srgbClr val="102A43"/>
                 </a:solidFill>
-                <a:latin typeface="STSong"/>
-                <a:ea typeface="STSong"/>
-                <a:cs typeface="STSong"/>
+                <a:latin typeface="Arial"/>
+                <a:ea typeface="Arial"/>
+                <a:cs typeface="Arial"/>
               </a:defRPr>
             </a:pPr>
             <a:r>
@@ -3628,11 +3628,11 @@
                 <a:solidFill>
                   <a:srgbClr val="102A43"/>
                 </a:solidFill>
-                <a:latin typeface="STSong"/>
-                <a:ea typeface="STSong"/>
-                <a:cs typeface="STSong"/>
-              </a:rPr>
-              <a:t>自动化执行路径</a:t>
+                <a:latin typeface="Arial"/>
+                <a:ea typeface="Arial"/>
+                <a:cs typeface="Arial"/>
+              </a:rPr>
+              <a:t>Automated Execution</a:t>
             </a:r>
           </a:p>
         </p:txBody>
@@ -3642,7 +3642,7 @@
           <p:cNvPr id="2" name="">
             <a:extLst xmlns:a="http://schemas.openxmlformats.org/drawingml/2006/main">
               <a:ext uri="{FF2B5EF4-FFF2-40B4-BE49-F238E27FC236}">
-                <a16:creationId xmlns:a16="http://schemas.microsoft.com/office/drawing/2014/main" id="{F3C1D944-B645-49F5-B60E-8CF3C442996B}"/>
+                <a16:creationId xmlns:a16="http://schemas.microsoft.com/office/drawing/2014/main" id="{CBA256B2-DCBF-48F4-8F01-6B0FE7F5DC35}"/>
               </a:ext>
             </a:extLst>
           </p:cNvPr>
@@ -3673,9 +3673,9 @@
                 <a:solidFill>
                   <a:srgbClr val="0B7285"/>
                 </a:solidFill>
-                <a:latin typeface="STSong"/>
-                <a:ea typeface="STSong"/>
-                <a:cs typeface="STSong"/>
+                <a:latin typeface="Arial"/>
+                <a:ea typeface="Arial"/>
+                <a:cs typeface="Arial"/>
               </a:defRPr>
             </a:pPr>
             <a:r>
@@ -3683,11 +3683,11 @@
                 <a:solidFill>
                   <a:srgbClr val="0B7285"/>
                 </a:solidFill>
-                <a:latin typeface="STSong"/>
-                <a:ea typeface="STSong"/>
-                <a:cs typeface="STSong"/>
-              </a:rPr>
-              <a:t>一条命令把清单变成可重复证据</a:t>
+                <a:latin typeface="Arial"/>
+                <a:ea typeface="Arial"/>
+                <a:cs typeface="Arial"/>
+              </a:rPr>
+              <a:t>One command creates repeatable evidence</a:t>
             </a:r>
           </a:p>
         </p:txBody>
@@ -3697,7 +3697,7 @@
           <p:cNvPr id="3" name="">
             <a:extLst xmlns:a="http://schemas.openxmlformats.org/drawingml/2006/main">
               <a:ext uri="{FF2B5EF4-FFF2-40B4-BE49-F238E27FC236}">
-                <a16:creationId xmlns:a16="http://schemas.microsoft.com/office/drawing/2014/main" id="{5C09412B-D266-47C0-96C2-B89FF0182057}"/>
+                <a16:creationId xmlns:a16="http://schemas.microsoft.com/office/drawing/2014/main" id="{C124809A-CF25-46F3-8755-85E3CACE7D65}"/>
               </a:ext>
             </a:extLst>
           </p:cNvPr>
@@ -3728,9 +3728,9 @@
                 <a:solidFill>
                   <a:srgbClr val="243B53"/>
                 </a:solidFill>
-                <a:latin typeface="STSong"/>
-                <a:ea typeface="STSong"/>
-                <a:cs typeface="STSong"/>
+                <a:latin typeface="Arial"/>
+                <a:ea typeface="Arial"/>
+                <a:cs typeface="Arial"/>
               </a:defRPr>
             </a:pPr>
             <a:r>
@@ -3738,11 +3738,11 @@
                 <a:solidFill>
                   <a:srgbClr val="243B53"/>
                 </a:solidFill>
-                <a:latin typeface="STSong"/>
-                <a:ea typeface="STSong"/>
-                <a:cs typeface="STSong"/>
-              </a:rPr>
-              <a:t>pytest 参数化数据驱动</a:t>
+                <a:latin typeface="Arial"/>
+                <a:ea typeface="Arial"/>
+                <a:cs typeface="Arial"/>
+              </a:rPr>
+              <a:t>pytest parameterization for data-driven cases</a:t>
             </a:r>
           </a:p>
           <a:p xmlns:a="http://schemas.openxmlformats.org/drawingml/2006/main">
@@ -3751,9 +3751,9 @@
                 <a:solidFill>
                   <a:srgbClr val="243B53"/>
                 </a:solidFill>
-                <a:latin typeface="STSong"/>
-                <a:ea typeface="STSong"/>
-                <a:cs typeface="STSong"/>
+                <a:latin typeface="Arial"/>
+                <a:ea typeface="Arial"/>
+                <a:cs typeface="Arial"/>
               </a:defRPr>
             </a:pPr>
             <a:r>
@@ -3761,11 +3761,11 @@
                 <a:solidFill>
                   <a:srgbClr val="243B53"/>
                 </a:solidFill>
-                <a:latin typeface="STSong"/>
-                <a:ea typeface="STSong"/>
-                <a:cs typeface="STSong"/>
-              </a:rPr>
-              <a:t>fixture 统一时间与时区</a:t>
+                <a:latin typeface="Arial"/>
+                <a:ea typeface="Arial"/>
+                <a:cs typeface="Arial"/>
+              </a:rPr>
+              <a:t>Fixtures provide common time and timezone setup</a:t>
             </a:r>
           </a:p>
           <a:p xmlns:a="http://schemas.openxmlformats.org/drawingml/2006/main">
@@ -3774,9 +3774,9 @@
                 <a:solidFill>
                   <a:srgbClr val="243B53"/>
                 </a:solidFill>
-                <a:latin typeface="STSong"/>
-                <a:ea typeface="STSong"/>
-                <a:cs typeface="STSong"/>
+                <a:latin typeface="Arial"/>
+                <a:ea typeface="Arial"/>
+                <a:cs typeface="Arial"/>
               </a:defRPr>
             </a:pPr>
             <a:r>
@@ -3784,11 +3784,11 @@
                 <a:solidFill>
                   <a:srgbClr val="243B53"/>
                 </a:solidFill>
-                <a:latin typeface="STSong"/>
-                <a:ea typeface="STSong"/>
-                <a:cs typeface="STSong"/>
-              </a:rPr>
-              <a:t>smoke / boundary / regression 标记</a:t>
+                <a:latin typeface="Arial"/>
+                <a:ea typeface="Arial"/>
+                <a:cs typeface="Arial"/>
+              </a:rPr>
+              <a:t>Markers: smoke / boundary / regression</a:t>
             </a:r>
           </a:p>
           <a:p xmlns:a="http://schemas.openxmlformats.org/drawingml/2006/main">
@@ -3797,9 +3797,9 @@
                 <a:solidFill>
                   <a:srgbClr val="243B53"/>
                 </a:solidFill>
-                <a:latin typeface="STSong"/>
-                <a:ea typeface="STSong"/>
-                <a:cs typeface="STSong"/>
+                <a:latin typeface="Arial"/>
+                <a:ea typeface="Arial"/>
+                <a:cs typeface="Arial"/>
               </a:defRPr>
             </a:pPr>
             <a:r>
@@ -3807,11 +3807,11 @@
                 <a:solidFill>
                   <a:srgbClr val="243B53"/>
                 </a:solidFill>
-                <a:latin typeface="STSong"/>
-                <a:ea typeface="STSong"/>
-                <a:cs typeface="STSong"/>
-              </a:rPr>
-              <a:t>运行：python -m pytest -q</a:t>
+                <a:latin typeface="Arial"/>
+                <a:ea typeface="Arial"/>
+                <a:cs typeface="Arial"/>
+              </a:rPr>
+              <a:t>Run: python -m pytest -q</a:t>
             </a:r>
           </a:p>
         </p:txBody>
@@ -3821,7 +3821,7 @@
           <p:cNvPr id="4" name="">
             <a:extLst xmlns:a="http://schemas.openxmlformats.org/drawingml/2006/main">
               <a:ext uri="{FF2B5EF4-FFF2-40B4-BE49-F238E27FC236}">
-                <a16:creationId xmlns:a16="http://schemas.microsoft.com/office/drawing/2014/main" id="{6818528A-061C-41E7-8D59-98FA93C1A67F}"/>
+                <a16:creationId xmlns:a16="http://schemas.microsoft.com/office/drawing/2014/main" id="{0A0D65B3-7EA8-4871-A74F-EA521D041566}"/>
               </a:ext>
             </a:extLst>
           </p:cNvPr>
@@ -3852,9 +3852,9 @@
                 <a:solidFill>
                   <a:srgbClr val="829AB1"/>
                 </a:solidFill>
-                <a:latin typeface="STSong"/>
-                <a:ea typeface="STSong"/>
-                <a:cs typeface="STSong"/>
+                <a:latin typeface="Arial"/>
+                <a:ea typeface="Arial"/>
+                <a:cs typeface="Arial"/>
               </a:defRPr>
             </a:pPr>
             <a:r>
@@ -3862,9 +3862,9 @@
                 <a:solidFill>
                   <a:srgbClr val="829AB1"/>
                 </a:solidFill>
-                <a:latin typeface="STSong"/>
-                <a:ea typeface="STSong"/>
-                <a:cs typeface="STSong"/>
+                <a:latin typeface="Arial"/>
+                <a:ea typeface="Arial"/>
+                <a:cs typeface="Arial"/>
               </a:rPr>
               <a:t>05</a:t>
             </a:r>
@@ -3874,7 +3874,7 @@
     </p:spTree>
     <p:extLst>
       <p:ext uri="{BB962C8B-B14F-4D97-AF65-F5344CB8AC3E}">
-        <p14:creationId xmlns:p14="http://schemas.microsoft.com/office/powerpoint/2010/main" val="1469437828"/>
+        <p14:creationId xmlns:p14="http://schemas.microsoft.com/office/powerpoint/2010/main" val="1713197360"/>
       </p:ext>
     </p:extLst>
   </p:cSld>
@@ -3905,7 +3905,7 @@
           <p:cNvPr id="5" name="">
             <a:extLst xmlns:a="http://schemas.openxmlformats.org/drawingml/2006/main">
               <a:ext uri="{FF2B5EF4-FFF2-40B4-BE49-F238E27FC236}">
-                <a16:creationId xmlns:a16="http://schemas.microsoft.com/office/drawing/2014/main" id="{AFD040FA-67AA-490E-AC5F-6950E66EA1EE}"/>
+                <a16:creationId xmlns:a16="http://schemas.microsoft.com/office/drawing/2014/main" id="{70FDE976-522C-4FCE-984B-FD9716F80F21}"/>
               </a:ext>
             </a:extLst>
           </p:cNvPr>
@@ -3936,9 +3936,9 @@
                 <a:solidFill>
                   <a:srgbClr val="102A43"/>
                 </a:solidFill>
-                <a:latin typeface="STSong"/>
-                <a:ea typeface="STSong"/>
-                <a:cs typeface="STSong"/>
+                <a:latin typeface="Arial"/>
+                <a:ea typeface="Arial"/>
+                <a:cs typeface="Arial"/>
               </a:defRPr>
             </a:pPr>
             <a:r>
@@ -3946,11 +3946,11 @@
                 <a:solidFill>
                   <a:srgbClr val="102A43"/>
                 </a:solidFill>
-                <a:latin typeface="STSong"/>
-                <a:ea typeface="STSong"/>
-                <a:cs typeface="STSong"/>
-              </a:rPr>
-              <a:t>用例清单结构</a:t>
+                <a:latin typeface="Arial"/>
+                <a:ea typeface="Arial"/>
+                <a:cs typeface="Arial"/>
+              </a:rPr>
+              <a:t>Test Case Design</a:t>
             </a:r>
           </a:p>
         </p:txBody>
@@ -3960,7 +3960,7 @@
           <p:cNvPr id="2" name="">
             <a:extLst xmlns:a="http://schemas.openxmlformats.org/drawingml/2006/main">
               <a:ext uri="{FF2B5EF4-FFF2-40B4-BE49-F238E27FC236}">
-                <a16:creationId xmlns:a16="http://schemas.microsoft.com/office/drawing/2014/main" id="{B78FA017-3118-4E4D-A084-7588304CA445}"/>
+                <a16:creationId xmlns:a16="http://schemas.microsoft.com/office/drawing/2014/main" id="{BFC4F99A-4478-4DB7-B25E-A97E7DAD3B88}"/>
               </a:ext>
             </a:extLst>
           </p:cNvPr>
@@ -3991,9 +3991,9 @@
                 <a:solidFill>
                   <a:srgbClr val="0B7285"/>
                 </a:solidFill>
-                <a:latin typeface="STSong"/>
-                <a:ea typeface="STSong"/>
-                <a:cs typeface="STSong"/>
+                <a:latin typeface="Arial"/>
+                <a:ea typeface="Arial"/>
+                <a:cs typeface="Arial"/>
               </a:defRPr>
             </a:pPr>
             <a:r>
@@ -4001,11 +4001,11 @@
                 <a:solidFill>
                   <a:srgbClr val="0B7285"/>
                 </a:solidFill>
-                <a:latin typeface="STSong"/>
-                <a:ea typeface="STSong"/>
-                <a:cs typeface="STSong"/>
-              </a:rPr>
-              <a:t>每条用例都能追溯到函数和结果</a:t>
+                <a:latin typeface="Arial"/>
+                <a:ea typeface="Arial"/>
+                <a:cs typeface="Arial"/>
+              </a:rPr>
+              <a:t>Every case is traceable to an API and result</a:t>
             </a:r>
           </a:p>
         </p:txBody>
@@ -4015,7 +4015,7 @@
           <p:cNvPr id="3" name="">
             <a:extLst xmlns:a="http://schemas.openxmlformats.org/drawingml/2006/main">
               <a:ext uri="{FF2B5EF4-FFF2-40B4-BE49-F238E27FC236}">
-                <a16:creationId xmlns:a16="http://schemas.microsoft.com/office/drawing/2014/main" id="{A495611F-D45D-4A96-A312-5852D6D32C13}"/>
+                <a16:creationId xmlns:a16="http://schemas.microsoft.com/office/drawing/2014/main" id="{AC3EBAB6-7019-4CD5-9ABD-02169FDBD4A7}"/>
               </a:ext>
             </a:extLst>
           </p:cNvPr>
@@ -4046,9 +4046,9 @@
                 <a:solidFill>
                   <a:srgbClr val="243B53"/>
                 </a:solidFill>
-                <a:latin typeface="STSong"/>
-                <a:ea typeface="STSong"/>
-                <a:cs typeface="STSong"/>
+                <a:latin typeface="Arial"/>
+                <a:ea typeface="Arial"/>
+                <a:cs typeface="Arial"/>
               </a:defRPr>
             </a:pPr>
             <a:r>
@@ -4056,11 +4056,11 @@
                 <a:solidFill>
                   <a:srgbClr val="243B53"/>
                 </a:solidFill>
-                <a:latin typeface="STSong"/>
-                <a:ea typeface="STSong"/>
-                <a:cs typeface="STSong"/>
-              </a:rPr>
-              <a:t>编号 CRON-UT-001～036</a:t>
+                <a:latin typeface="Arial"/>
+                <a:ea typeface="Arial"/>
+                <a:cs typeface="Arial"/>
+              </a:rPr>
+              <a:t>IDs: CRON-UT-001 to CRON-UT-036</a:t>
             </a:r>
           </a:p>
           <a:p xmlns:a="http://schemas.openxmlformats.org/drawingml/2006/main">
@@ -4069,9 +4069,9 @@
                 <a:solidFill>
                   <a:srgbClr val="243B53"/>
                 </a:solidFill>
-                <a:latin typeface="STSong"/>
-                <a:ea typeface="STSong"/>
-                <a:cs typeface="STSong"/>
+                <a:latin typeface="Arial"/>
+                <a:ea typeface="Arial"/>
+                <a:cs typeface="Arial"/>
               </a:defRPr>
             </a:pPr>
             <a:r>
@@ -4079,11 +4079,11 @@
                 <a:solidFill>
                   <a:srgbClr val="243B53"/>
                 </a:solidFill>
-                <a:latin typeface="STSong"/>
-                <a:ea typeface="STSong"/>
-                <a:cs typeface="STSong"/>
-              </a:rPr>
-              <a:t>字段包含：输入、步骤、预期、实际、状态、设计方法</a:t>
+                <a:latin typeface="Arial"/>
+                <a:ea typeface="Arial"/>
+                <a:cs typeface="Arial"/>
+              </a:rPr>
+              <a:t>Fields: input, steps, expected, actual, status, method</a:t>
             </a:r>
           </a:p>
           <a:p xmlns:a="http://schemas.openxmlformats.org/drawingml/2006/main">
@@ -4092,9 +4092,9 @@
                 <a:solidFill>
                   <a:srgbClr val="243B53"/>
                 </a:solidFill>
-                <a:latin typeface="STSong"/>
-                <a:ea typeface="STSong"/>
-                <a:cs typeface="STSong"/>
+                <a:latin typeface="Arial"/>
+                <a:ea typeface="Arial"/>
+                <a:cs typeface="Arial"/>
               </a:defRPr>
             </a:pPr>
             <a:r>
@@ -4102,11 +4102,11 @@
                 <a:solidFill>
                   <a:srgbClr val="243B53"/>
                 </a:solidFill>
-                <a:latin typeface="STSong"/>
-                <a:ea typeface="STSong"/>
-                <a:cs typeface="STSong"/>
-              </a:rPr>
-              <a:t>测试数据保存在 testdata/cron_cases.json</a:t>
+                <a:latin typeface="Arial"/>
+                <a:ea typeface="Arial"/>
+                <a:cs typeface="Arial"/>
+              </a:rPr>
+              <a:t>Data: testdata/cron_cases.json</a:t>
             </a:r>
           </a:p>
           <a:p xmlns:a="http://schemas.openxmlformats.org/drawingml/2006/main">
@@ -4115,9 +4115,9 @@
                 <a:solidFill>
                   <a:srgbClr val="243B53"/>
                 </a:solidFill>
-                <a:latin typeface="STSong"/>
-                <a:ea typeface="STSong"/>
-                <a:cs typeface="STSong"/>
+                <a:latin typeface="Arial"/>
+                <a:ea typeface="Arial"/>
+                <a:cs typeface="Arial"/>
               </a:defRPr>
             </a:pPr>
             <a:r>
@@ -4125,11 +4125,11 @@
                 <a:solidFill>
                   <a:srgbClr val="243B53"/>
                 </a:solidFill>
-                <a:latin typeface="STSong"/>
-                <a:ea typeface="STSong"/>
-                <a:cs typeface="STSong"/>
-              </a:rPr>
-              <a:t>清单模板：附录1-测试用例清单.xlsx</a:t>
+                <a:latin typeface="Arial"/>
+                <a:ea typeface="Arial"/>
+                <a:cs typeface="Arial"/>
+              </a:rPr>
+              <a:t>Deliverable: Appendix1-test-cases.xlsx</a:t>
             </a:r>
           </a:p>
         </p:txBody>
@@ -4139,7 +4139,7 @@
           <p:cNvPr id="4" name="">
             <a:extLst xmlns:a="http://schemas.openxmlformats.org/drawingml/2006/main">
               <a:ext uri="{FF2B5EF4-FFF2-40B4-BE49-F238E27FC236}">
-                <a16:creationId xmlns:a16="http://schemas.microsoft.com/office/drawing/2014/main" id="{0A5ECD12-F320-41AA-9935-59F98F4E3E74}"/>
+                <a16:creationId xmlns:a16="http://schemas.microsoft.com/office/drawing/2014/main" id="{A6DF59F3-1D84-4C60-AE78-B3B14A0B2D74}"/>
               </a:ext>
             </a:extLst>
           </p:cNvPr>
@@ -4170,9 +4170,9 @@
                 <a:solidFill>
                   <a:srgbClr val="829AB1"/>
                 </a:solidFill>
-                <a:latin typeface="STSong"/>
-                <a:ea typeface="STSong"/>
-                <a:cs typeface="STSong"/>
+                <a:latin typeface="Arial"/>
+                <a:ea typeface="Arial"/>
+                <a:cs typeface="Arial"/>
               </a:defRPr>
             </a:pPr>
             <a:r>
@@ -4180,9 +4180,9 @@
                 <a:solidFill>
                   <a:srgbClr val="829AB1"/>
                 </a:solidFill>
-                <a:latin typeface="STSong"/>
-                <a:ea typeface="STSong"/>
-                <a:cs typeface="STSong"/>
+                <a:latin typeface="Arial"/>
+                <a:ea typeface="Arial"/>
+                <a:cs typeface="Arial"/>
               </a:rPr>
               <a:t>06</a:t>
             </a:r>
@@ -4192,7 +4192,7 @@
     </p:spTree>
     <p:extLst>
       <p:ext uri="{BB962C8B-B14F-4D97-AF65-F5344CB8AC3E}">
-        <p14:creationId xmlns:p14="http://schemas.microsoft.com/office/powerpoint/2010/main" val="2138203054"/>
+        <p14:creationId xmlns:p14="http://schemas.microsoft.com/office/powerpoint/2010/main" val="883157533"/>
       </p:ext>
     </p:extLst>
   </p:cSld>
@@ -4223,7 +4223,7 @@
           <p:cNvPr id="5" name="">
             <a:extLst xmlns:a="http://schemas.openxmlformats.org/drawingml/2006/main">
               <a:ext uri="{FF2B5EF4-FFF2-40B4-BE49-F238E27FC236}">
-                <a16:creationId xmlns:a16="http://schemas.microsoft.com/office/drawing/2014/main" id="{F8490793-852B-497B-833B-6E4F95E71657}"/>
+                <a16:creationId xmlns:a16="http://schemas.microsoft.com/office/drawing/2014/main" id="{2AFB5D00-4896-403D-B003-00BDCDF7F0B7}"/>
               </a:ext>
             </a:extLst>
           </p:cNvPr>
@@ -4254,9 +4254,9 @@
                 <a:solidFill>
                   <a:srgbClr val="102A43"/>
                 </a:solidFill>
-                <a:latin typeface="STSong"/>
-                <a:ea typeface="STSong"/>
-                <a:cs typeface="STSong"/>
+                <a:latin typeface="Arial"/>
+                <a:ea typeface="Arial"/>
+                <a:cs typeface="Arial"/>
               </a:defRPr>
             </a:pPr>
             <a:r>
@@ -4264,11 +4264,11 @@
                 <a:solidFill>
                   <a:srgbClr val="102A43"/>
                 </a:solidFill>
-                <a:latin typeface="STSong"/>
-                <a:ea typeface="STSong"/>
-                <a:cs typeface="STSong"/>
-              </a:rPr>
-              <a:t>缺陷复现：零步长范围</a:t>
+                <a:latin typeface="Arial"/>
+                <a:ea typeface="Arial"/>
+                <a:cs typeface="Arial"/>
+              </a:rPr>
+              <a:t>Defect Reproduction: Zero Step</a:t>
             </a:r>
           </a:p>
         </p:txBody>
@@ -4278,7 +4278,7 @@
           <p:cNvPr id="2" name="">
             <a:extLst xmlns:a="http://schemas.openxmlformats.org/drawingml/2006/main">
               <a:ext uri="{FF2B5EF4-FFF2-40B4-BE49-F238E27FC236}">
-                <a16:creationId xmlns:a16="http://schemas.microsoft.com/office/drawing/2014/main" id="{61666E31-30E8-4F88-872F-985B8B36AFB6}"/>
+                <a16:creationId xmlns:a16="http://schemas.microsoft.com/office/drawing/2014/main" id="{CBBF1D29-31E6-4496-A14B-6CEBE8D211C4}"/>
               </a:ext>
             </a:extLst>
           </p:cNvPr>
@@ -4309,9 +4309,9 @@
                 <a:solidFill>
                   <a:srgbClr val="0B7285"/>
                 </a:solidFill>
-                <a:latin typeface="STSong"/>
-                <a:ea typeface="STSong"/>
-                <a:cs typeface="STSong"/>
+                <a:latin typeface="Arial"/>
+                <a:ea typeface="Arial"/>
+                <a:cs typeface="Arial"/>
               </a:defRPr>
             </a:pPr>
             <a:r>
@@ -4319,11 +4319,11 @@
                 <a:solidFill>
                   <a:srgbClr val="0B7285"/>
                 </a:solidFill>
-                <a:latin typeface="STSong"/>
-                <a:ea typeface="STSong"/>
-                <a:cs typeface="STSong"/>
-              </a:rPr>
-              <a:t>基线版本接受了不应接受的步长输入</a:t>
+                <a:latin typeface="Arial"/>
+                <a:ea typeface="Arial"/>
+                <a:cs typeface="Arial"/>
+              </a:rPr>
+              <a:t>The baseline exposed an unstable exception path</a:t>
             </a:r>
           </a:p>
         </p:txBody>
@@ -4333,7 +4333,7 @@
           <p:cNvPr id="3" name="">
             <a:extLst xmlns:a="http://schemas.openxmlformats.org/drawingml/2006/main">
               <a:ext uri="{FF2B5EF4-FFF2-40B4-BE49-F238E27FC236}">
-                <a16:creationId xmlns:a16="http://schemas.microsoft.com/office/drawing/2014/main" id="{FD5F85A5-85AA-4FDB-AE4B-6912E859BC86}"/>
+                <a16:creationId xmlns:a16="http://schemas.microsoft.com/office/drawing/2014/main" id="{F176B521-E287-4CC6-A5C7-10E1FEB55DE1}"/>
               </a:ext>
             </a:extLst>
           </p:cNvPr>
@@ -4364,9 +4364,9 @@
                 <a:solidFill>
                   <a:srgbClr val="243B53"/>
                 </a:solidFill>
-                <a:latin typeface="STSong"/>
-                <a:ea typeface="STSong"/>
-                <a:cs typeface="STSong"/>
+                <a:latin typeface="Arial"/>
+                <a:ea typeface="Arial"/>
+                <a:cs typeface="Arial"/>
               </a:defRPr>
             </a:pPr>
             <a:r>
@@ -4374,11 +4374,11 @@
                 <a:solidFill>
                   <a:srgbClr val="243B53"/>
                 </a:solidFill>
-                <a:latin typeface="STSong"/>
-                <a:ea typeface="STSong"/>
-                <a:cs typeface="STSong"/>
-              </a:rPr>
-              <a:t>表达式：5-5/0</a:t>
+                <a:latin typeface="Arial"/>
+                <a:ea typeface="Arial"/>
+                <a:cs typeface="Arial"/>
+              </a:rPr>
+              <a:t>Expression: 5-5/0</a:t>
             </a:r>
           </a:p>
           <a:p xmlns:a="http://schemas.openxmlformats.org/drawingml/2006/main">
@@ -4387,9 +4387,9 @@
                 <a:solidFill>
                   <a:srgbClr val="243B53"/>
                 </a:solidFill>
-                <a:latin typeface="STSong"/>
-                <a:ea typeface="STSong"/>
-                <a:cs typeface="STSong"/>
+                <a:latin typeface="Arial"/>
+                <a:ea typeface="Arial"/>
+                <a:cs typeface="Arial"/>
               </a:defRPr>
             </a:pPr>
             <a:r>
@@ -4397,11 +4397,11 @@
                 <a:solidFill>
                   <a:srgbClr val="243B53"/>
                 </a:solidFill>
-                <a:latin typeface="STSong"/>
-                <a:ea typeface="STSong"/>
-                <a:cs typeface="STSong"/>
-              </a:rPr>
-              <a:t>基线 6.2.2：行为异常，未稳定拒绝</a:t>
+                <a:latin typeface="Arial"/>
+                <a:ea typeface="Arial"/>
+                <a:cs typeface="Arial"/>
+              </a:rPr>
+              <a:t>Baseline 6.2.2: raw ValueError, not stable CroniterBadCronError</a:t>
             </a:r>
           </a:p>
           <a:p xmlns:a="http://schemas.openxmlformats.org/drawingml/2006/main">
@@ -4410,9 +4410,9 @@
                 <a:solidFill>
                   <a:srgbClr val="243B53"/>
                 </a:solidFill>
-                <a:latin typeface="STSong"/>
-                <a:ea typeface="STSong"/>
-                <a:cs typeface="STSong"/>
+                <a:latin typeface="Arial"/>
+                <a:ea typeface="Arial"/>
+                <a:cs typeface="Arial"/>
               </a:defRPr>
             </a:pPr>
             <a:r>
@@ -4420,11 +4420,11 @@
                 <a:solidFill>
                   <a:srgbClr val="243B53"/>
                 </a:solidFill>
-                <a:latin typeface="STSong"/>
-                <a:ea typeface="STSong"/>
-                <a:cs typeface="STSong"/>
-              </a:rPr>
-              <a:t>修复：07dfad8 增加步长校验</a:t>
+                <a:latin typeface="Arial"/>
+                <a:ea typeface="Arial"/>
+                <a:cs typeface="Arial"/>
+              </a:rPr>
+              <a:t>Fix: 07dfad8 adds explicit step validation</a:t>
             </a:r>
           </a:p>
           <a:p xmlns:a="http://schemas.openxmlformats.org/drawingml/2006/main">
@@ -4433,9 +4433,9 @@
                 <a:solidFill>
                   <a:srgbClr val="243B53"/>
                 </a:solidFill>
-                <a:latin typeface="STSong"/>
-                <a:ea typeface="STSong"/>
-                <a:cs typeface="STSong"/>
+                <a:latin typeface="Arial"/>
+                <a:ea typeface="Arial"/>
+                <a:cs typeface="Arial"/>
               </a:defRPr>
             </a:pPr>
             <a:r>
@@ -4443,11 +4443,11 @@
                 <a:solidFill>
                   <a:srgbClr val="243B53"/>
                 </a:solidFill>
-                <a:latin typeface="STSong"/>
-                <a:ea typeface="STSong"/>
-                <a:cs typeface="STSong"/>
-              </a:rPr>
-              <a:t>回归：零步长稳定抛出异常，合法步长继续通过</a:t>
+                <a:latin typeface="Arial"/>
+                <a:ea typeface="Arial"/>
+                <a:cs typeface="Arial"/>
+              </a:rPr>
+              <a:t>Regression: zero step rejected; valid steps still pass</a:t>
             </a:r>
           </a:p>
         </p:txBody>
@@ -4457,7 +4457,7 @@
           <p:cNvPr id="4" name="">
             <a:extLst xmlns:a="http://schemas.openxmlformats.org/drawingml/2006/main">
               <a:ext uri="{FF2B5EF4-FFF2-40B4-BE49-F238E27FC236}">
-                <a16:creationId xmlns:a16="http://schemas.microsoft.com/office/drawing/2014/main" id="{080C0B37-867F-4557-B453-D633D573AB6D}"/>
+                <a16:creationId xmlns:a16="http://schemas.microsoft.com/office/drawing/2014/main" id="{F065D114-764E-4AEF-B778-FEECEE54EB77}"/>
               </a:ext>
             </a:extLst>
           </p:cNvPr>
@@ -4488,9 +4488,9 @@
                 <a:solidFill>
                   <a:srgbClr val="829AB1"/>
                 </a:solidFill>
-                <a:latin typeface="STSong"/>
-                <a:ea typeface="STSong"/>
-                <a:cs typeface="STSong"/>
+                <a:latin typeface="Arial"/>
+                <a:ea typeface="Arial"/>
+                <a:cs typeface="Arial"/>
               </a:defRPr>
             </a:pPr>
             <a:r>
@@ -4498,9 +4498,9 @@
                 <a:solidFill>
                   <a:srgbClr val="829AB1"/>
                 </a:solidFill>
-                <a:latin typeface="STSong"/>
-                <a:ea typeface="STSong"/>
-                <a:cs typeface="STSong"/>
+                <a:latin typeface="Arial"/>
+                <a:ea typeface="Arial"/>
+                <a:cs typeface="Arial"/>
               </a:rPr>
               <a:t>07</a:t>
             </a:r>
@@ -4510,7 +4510,7 @@
     </p:spTree>
     <p:extLst>
       <p:ext uri="{BB962C8B-B14F-4D97-AF65-F5344CB8AC3E}">
-        <p14:creationId xmlns:p14="http://schemas.microsoft.com/office/powerpoint/2010/main" val="1095526866"/>
+        <p14:creationId xmlns:p14="http://schemas.microsoft.com/office/powerpoint/2010/main" val="533074074"/>
       </p:ext>
     </p:extLst>
   </p:cSld>
@@ -4541,7 +4541,7 @@
           <p:cNvPr id="5" name="">
             <a:extLst xmlns:a="http://schemas.openxmlformats.org/drawingml/2006/main">
               <a:ext uri="{FF2B5EF4-FFF2-40B4-BE49-F238E27FC236}">
-                <a16:creationId xmlns:a16="http://schemas.microsoft.com/office/drawing/2014/main" id="{B696F0FF-E7FA-4867-9115-E9AC13F2353D}"/>
+                <a16:creationId xmlns:a16="http://schemas.microsoft.com/office/drawing/2014/main" id="{776409C6-7641-4650-AD39-24E7E5AF4979}"/>
               </a:ext>
             </a:extLst>
           </p:cNvPr>
@@ -4572,9 +4572,9 @@
                 <a:solidFill>
                   <a:srgbClr val="102A43"/>
                 </a:solidFill>
-                <a:latin typeface="STSong"/>
-                <a:ea typeface="STSong"/>
-                <a:cs typeface="STSong"/>
+                <a:latin typeface="Arial"/>
+                <a:ea typeface="Arial"/>
+                <a:cs typeface="Arial"/>
               </a:defRPr>
             </a:pPr>
             <a:r>
@@ -4582,11 +4582,11 @@
                 <a:solidFill>
                   <a:srgbClr val="102A43"/>
                 </a:solidFill>
-                <a:latin typeface="STSong"/>
-                <a:ea typeface="STSong"/>
-                <a:cs typeface="STSong"/>
-              </a:rPr>
-              <a:t>缺陷闭环：月份与 Sunday 边界</a:t>
+                <a:latin typeface="Arial"/>
+                <a:ea typeface="Arial"/>
+                <a:cs typeface="Arial"/>
+              </a:rPr>
+              <a:t>Defect Closure: Month and Sunday</a:t>
             </a:r>
           </a:p>
         </p:txBody>
@@ -4596,7 +4596,7 @@
           <p:cNvPr id="2" name="">
             <a:extLst xmlns:a="http://schemas.openxmlformats.org/drawingml/2006/main">
               <a:ext uri="{FF2B5EF4-FFF2-40B4-BE49-F238E27FC236}">
-                <a16:creationId xmlns:a16="http://schemas.microsoft.com/office/drawing/2014/main" id="{F069D21A-0635-44F0-8E4F-5F39B6E7AD59}"/>
+                <a16:creationId xmlns:a16="http://schemas.microsoft.com/office/drawing/2014/main" id="{C9C7FA64-E65A-4944-8611-88E871D8977A}"/>
               </a:ext>
             </a:extLst>
           </p:cNvPr>
@@ -4627,9 +4627,9 @@
                 <a:solidFill>
                   <a:srgbClr val="0B7285"/>
                 </a:solidFill>
-                <a:latin typeface="STSong"/>
-                <a:ea typeface="STSong"/>
-                <a:cs typeface="STSong"/>
+                <a:latin typeface="Arial"/>
+                <a:ea typeface="Arial"/>
+                <a:cs typeface="Arial"/>
               </a:defRPr>
             </a:pPr>
             <a:r>
@@ -4637,11 +4637,11 @@
                 <a:solidFill>
                   <a:srgbClr val="0B7285"/>
                 </a:solidFill>
-                <a:latin typeface="STSong"/>
-                <a:ea typeface="STSong"/>
-                <a:cs typeface="STSong"/>
-              </a:rPr>
-              <a:t>公开记录提供证据，本地回归证明修复有效</a:t>
+                <a:latin typeface="Arial"/>
+                <a:ea typeface="Arial"/>
+                <a:cs typeface="Arial"/>
+              </a:rPr>
+              <a:t>Public records plus local regression make the fix auditable</a:t>
             </a:r>
           </a:p>
         </p:txBody>
@@ -4651,7 +4651,7 @@
           <p:cNvPr id="3" name="">
             <a:extLst xmlns:a="http://schemas.openxmlformats.org/drawingml/2006/main">
               <a:ext uri="{FF2B5EF4-FFF2-40B4-BE49-F238E27FC236}">
-                <a16:creationId xmlns:a16="http://schemas.microsoft.com/office/drawing/2014/main" id="{1DCB39D2-CBDC-46AC-905A-1FEF443DCE73}"/>
+                <a16:creationId xmlns:a16="http://schemas.microsoft.com/office/drawing/2014/main" id="{6F3F69B4-D411-4C25-A78B-C50AFB6520F4}"/>
               </a:ext>
             </a:extLst>
           </p:cNvPr>
@@ -4682,9 +4682,9 @@
                 <a:solidFill>
                   <a:srgbClr val="243B53"/>
                 </a:solidFill>
-                <a:latin typeface="STSong"/>
-                <a:ea typeface="STSong"/>
-                <a:cs typeface="STSong"/>
+                <a:latin typeface="Arial"/>
+                <a:ea typeface="Arial"/>
+                <a:cs typeface="Arial"/>
               </a:defRPr>
             </a:pPr>
             <a:r>
@@ -4692,11 +4692,11 @@
                 <a:solidFill>
                   <a:srgbClr val="243B53"/>
                 </a:solidFill>
-                <a:latin typeface="STSong"/>
-                <a:ea typeface="STSong"/>
-                <a:cs typeface="STSong"/>
-              </a:rPr>
-              <a:t>月份边界：issue #235，对应修复 101f39e</a:t>
+                <a:latin typeface="Arial"/>
+                <a:ea typeface="Arial"/>
+                <a:cs typeface="Arial"/>
+              </a:rPr>
+              <a:t>Month boundary: issue #235, fix 101f39e</a:t>
             </a:r>
           </a:p>
           <a:p xmlns:a="http://schemas.openxmlformats.org/drawingml/2006/main">
@@ -4705,9 +4705,9 @@
                 <a:solidFill>
                   <a:srgbClr val="243B53"/>
                 </a:solidFill>
-                <a:latin typeface="STSong"/>
-                <a:ea typeface="STSong"/>
-                <a:cs typeface="STSong"/>
+                <a:latin typeface="Arial"/>
+                <a:ea typeface="Arial"/>
+                <a:cs typeface="Arial"/>
               </a:defRPr>
             </a:pPr>
             <a:r>
@@ -4715,11 +4715,11 @@
                 <a:solidFill>
                   <a:srgbClr val="243B53"/>
                 </a:solidFill>
-                <a:latin typeface="STSong"/>
-                <a:ea typeface="STSong"/>
-                <a:cs typeface="STSong"/>
-              </a:rPr>
-              <a:t>Sunday 步进：issue #239，对应修复 10e9bb6</a:t>
+                <a:latin typeface="Arial"/>
+                <a:ea typeface="Arial"/>
+                <a:cs typeface="Arial"/>
+              </a:rPr>
+              <a:t>Sunday stepping: issue #239, fix 10e9bb6</a:t>
             </a:r>
           </a:p>
           <a:p xmlns:a="http://schemas.openxmlformats.org/drawingml/2006/main">
@@ -4728,9 +4728,9 @@
                 <a:solidFill>
                   <a:srgbClr val="243B53"/>
                 </a:solidFill>
-                <a:latin typeface="STSong"/>
-                <a:ea typeface="STSong"/>
-                <a:cs typeface="STSong"/>
+                <a:latin typeface="Arial"/>
+                <a:ea typeface="Arial"/>
+                <a:cs typeface="Arial"/>
               </a:defRPr>
             </a:pPr>
             <a:r>
@@ -4738,11 +4738,11 @@
                 <a:solidFill>
                   <a:srgbClr val="243B53"/>
                 </a:solidFill>
-                <a:latin typeface="STSong"/>
-                <a:ea typeface="STSong"/>
-                <a:cs typeface="STSong"/>
-              </a:rPr>
-              <a:t>分别覆盖 1 月、12 月、跨年和 Saturday→Sunday</a:t>
+                <a:latin typeface="Arial"/>
+                <a:ea typeface="Arial"/>
+                <a:cs typeface="Arial"/>
+              </a:rPr>
+              <a:t>Checks include January, December, rollover, and Saturday to Sunday</a:t>
             </a:r>
           </a:p>
         </p:txBody>
@@ -4752,7 +4752,7 @@
           <p:cNvPr id="4" name="">
             <a:extLst xmlns:a="http://schemas.openxmlformats.org/drawingml/2006/main">
               <a:ext uri="{FF2B5EF4-FFF2-40B4-BE49-F238E27FC236}">
-                <a16:creationId xmlns:a16="http://schemas.microsoft.com/office/drawing/2014/main" id="{9B828F8F-DF1E-4399-91FF-E8C62B987CD7}"/>
+                <a16:creationId xmlns:a16="http://schemas.microsoft.com/office/drawing/2014/main" id="{F643E188-6116-43AD-9181-8F07A844900B}"/>
               </a:ext>
             </a:extLst>
           </p:cNvPr>
@@ -4783,9 +4783,9 @@
                 <a:solidFill>
                   <a:srgbClr val="829AB1"/>
                 </a:solidFill>
-                <a:latin typeface="STSong"/>
-                <a:ea typeface="STSong"/>
-                <a:cs typeface="STSong"/>
+                <a:latin typeface="Arial"/>
+                <a:ea typeface="Arial"/>
+                <a:cs typeface="Arial"/>
               </a:defRPr>
             </a:pPr>
             <a:r>
@@ -4793,9 +4793,9 @@
                 <a:solidFill>
                   <a:srgbClr val="829AB1"/>
                 </a:solidFill>
-                <a:latin typeface="STSong"/>
-                <a:ea typeface="STSong"/>
-                <a:cs typeface="STSong"/>
+                <a:latin typeface="Arial"/>
+                <a:ea typeface="Arial"/>
+                <a:cs typeface="Arial"/>
               </a:rPr>
               <a:t>08</a:t>
             </a:r>
@@ -4805,7 +4805,7 @@
     </p:spTree>
     <p:extLst>
       <p:ext uri="{BB962C8B-B14F-4D97-AF65-F5344CB8AC3E}">
-        <p14:creationId xmlns:p14="http://schemas.microsoft.com/office/powerpoint/2010/main" val="1600532929"/>
+        <p14:creationId xmlns:p14="http://schemas.microsoft.com/office/powerpoint/2010/main" val="1964528828"/>
       </p:ext>
     </p:extLst>
   </p:cSld>
@@ -4836,7 +4836,7 @@
           <p:cNvPr id="5" name="">
             <a:extLst xmlns:a="http://schemas.openxmlformats.org/drawingml/2006/main">
               <a:ext uri="{FF2B5EF4-FFF2-40B4-BE49-F238E27FC236}">
-                <a16:creationId xmlns:a16="http://schemas.microsoft.com/office/drawing/2014/main" id="{B9408596-9749-4A30-8289-9B4725B69B9A}"/>
+                <a16:creationId xmlns:a16="http://schemas.microsoft.com/office/drawing/2014/main" id="{954948A7-41F6-4B89-8C62-15B0A57E389C}"/>
               </a:ext>
             </a:extLst>
           </p:cNvPr>
@@ -4867,9 +4867,9 @@
                 <a:solidFill>
                   <a:srgbClr val="102A43"/>
                 </a:solidFill>
-                <a:latin typeface="STSong"/>
-                <a:ea typeface="STSong"/>
-                <a:cs typeface="STSong"/>
+                <a:latin typeface="Arial"/>
+                <a:ea typeface="Arial"/>
+                <a:cs typeface="Arial"/>
               </a:defRPr>
             </a:pPr>
             <a:r>
@@ -4877,11 +4877,11 @@
                 <a:solidFill>
                   <a:srgbClr val="102A43"/>
                 </a:solidFill>
-                <a:latin typeface="STSong"/>
-                <a:ea typeface="STSong"/>
-                <a:cs typeface="STSong"/>
-              </a:rPr>
-              <a:t>执行结果</a:t>
+                <a:latin typeface="Arial"/>
+                <a:ea typeface="Arial"/>
+                <a:cs typeface="Arial"/>
+              </a:rPr>
+              <a:t>Execution Results</a:t>
             </a:r>
           </a:p>
         </p:txBody>
@@ -4891,7 +4891,7 @@
           <p:cNvPr id="2" name="">
             <a:extLst xmlns:a="http://schemas.openxmlformats.org/drawingml/2006/main">
               <a:ext uri="{FF2B5EF4-FFF2-40B4-BE49-F238E27FC236}">
-                <a16:creationId xmlns:a16="http://schemas.microsoft.com/office/drawing/2014/main" id="{56E3C495-AC39-41AB-AE0E-7291317F890E}"/>
+                <a16:creationId xmlns:a16="http://schemas.microsoft.com/office/drawing/2014/main" id="{EBF3A589-0414-438F-B5B3-22550BC0FA2B}"/>
               </a:ext>
             </a:extLst>
           </p:cNvPr>
@@ -4922,9 +4922,9 @@
                 <a:solidFill>
                   <a:srgbClr val="0B7285"/>
                 </a:solidFill>
-                <a:latin typeface="STSong"/>
-                <a:ea typeface="STSong"/>
-                <a:cs typeface="STSong"/>
+                <a:latin typeface="Arial"/>
+                <a:ea typeface="Arial"/>
+                <a:cs typeface="Arial"/>
               </a:defRPr>
             </a:pPr>
             <a:r>
@@ -4932,11 +4932,11 @@
                 <a:solidFill>
                   <a:srgbClr val="0B7285"/>
                 </a:solidFill>
-                <a:latin typeface="STSong"/>
-                <a:ea typeface="STSong"/>
-                <a:cs typeface="STSong"/>
-              </a:rPr>
-              <a:t>测试通过，覆盖率用于定位后续风险</a:t>
+                <a:latin typeface="Arial"/>
+                <a:ea typeface="Arial"/>
+                <a:cs typeface="Arial"/>
+              </a:rPr>
+              <a:t>Passing tests identify confidence and remaining risk</a:t>
             </a:r>
           </a:p>
         </p:txBody>
@@ -4946,7 +4946,7 @@
           <p:cNvPr id="3" name="">
             <a:extLst xmlns:a="http://schemas.openxmlformats.org/drawingml/2006/main">
               <a:ext uri="{FF2B5EF4-FFF2-40B4-BE49-F238E27FC236}">
-                <a16:creationId xmlns:a16="http://schemas.microsoft.com/office/drawing/2014/main" id="{4071480A-13F7-47F4-8B45-DC9294E403AD}"/>
+                <a16:creationId xmlns:a16="http://schemas.microsoft.com/office/drawing/2014/main" id="{74D96292-06BD-4D7F-8E2C-C1A838C03B59}"/>
               </a:ext>
             </a:extLst>
           </p:cNvPr>
@@ -4977,9 +4977,9 @@
                 <a:solidFill>
                   <a:srgbClr val="243B53"/>
                 </a:solidFill>
-                <a:latin typeface="STSong"/>
-                <a:ea typeface="STSong"/>
-                <a:cs typeface="STSong"/>
+                <a:latin typeface="Arial"/>
+                <a:ea typeface="Arial"/>
+                <a:cs typeface="Arial"/>
               </a:defRPr>
             </a:pPr>
             <a:r>
@@ -4987,11 +4987,11 @@
                 <a:solidFill>
                   <a:srgbClr val="243B53"/>
                 </a:solidFill>
-                <a:latin typeface="STSong"/>
-                <a:ea typeface="STSong"/>
-                <a:cs typeface="STSong"/>
-              </a:rPr>
-              <a:t>41 passed</a:t>
+                <a:latin typeface="Arial"/>
+                <a:ea typeface="Arial"/>
+                <a:cs typeface="Arial"/>
+              </a:rPr>
+              <a:t>41 passed / 0 failed / 0 skipped</a:t>
             </a:r>
           </a:p>
           <a:p xmlns:a="http://schemas.openxmlformats.org/drawingml/2006/main">
@@ -5000,9 +5000,9 @@
                 <a:solidFill>
                   <a:srgbClr val="243B53"/>
                 </a:solidFill>
-                <a:latin typeface="STSong"/>
-                <a:ea typeface="STSong"/>
-                <a:cs typeface="STSong"/>
+                <a:latin typeface="Arial"/>
+                <a:ea typeface="Arial"/>
+                <a:cs typeface="Arial"/>
               </a:defRPr>
             </a:pPr>
             <a:r>
@@ -5010,11 +5010,11 @@
                 <a:solidFill>
                   <a:srgbClr val="243B53"/>
                 </a:solidFill>
-                <a:latin typeface="STSong"/>
-                <a:ea typeface="STSong"/>
-                <a:cs typeface="STSong"/>
-              </a:rPr>
-              <a:t>覆盖率：55%（当前结果，如实记录）</a:t>
+                <a:latin typeface="Arial"/>
+                <a:ea typeface="Arial"/>
+                <a:cs typeface="Arial"/>
+              </a:rPr>
+              <a:t>Branch coverage: 55 percent (current test set)</a:t>
             </a:r>
           </a:p>
           <a:p xmlns:a="http://schemas.openxmlformats.org/drawingml/2006/main">
@@ -5023,9 +5023,9 @@
                 <a:solidFill>
                   <a:srgbClr val="243B53"/>
                 </a:solidFill>
-                <a:latin typeface="STSong"/>
-                <a:ea typeface="STSong"/>
-                <a:cs typeface="STSong"/>
+                <a:latin typeface="Arial"/>
+                <a:ea typeface="Arial"/>
+                <a:cs typeface="Arial"/>
               </a:defRPr>
             </a:pPr>
             <a:r>
@@ -5033,11 +5033,11 @@
                 <a:solidFill>
                   <a:srgbClr val="243B53"/>
                 </a:solidFill>
-                <a:latin typeface="STSong"/>
-                <a:ea typeface="STSong"/>
-                <a:cs typeface="STSong"/>
-              </a:rPr>
-              <a:t>三项历史缺陷均完成复现、修复和回归</a:t>
+                <a:latin typeface="Arial"/>
+                <a:ea typeface="Arial"/>
+                <a:cs typeface="Arial"/>
+              </a:rPr>
+              <a:t>Three historical defects reproduced, fixed, and regressed</a:t>
             </a:r>
           </a:p>
           <a:p xmlns:a="http://schemas.openxmlformats.org/drawingml/2006/main">
@@ -5046,9 +5046,9 @@
                 <a:solidFill>
                   <a:srgbClr val="243B53"/>
                 </a:solidFill>
-                <a:latin typeface="STSong"/>
-                <a:ea typeface="STSong"/>
-                <a:cs typeface="STSong"/>
+                <a:latin typeface="Arial"/>
+                <a:ea typeface="Arial"/>
+                <a:cs typeface="Arial"/>
               </a:defRPr>
             </a:pPr>
             <a:r>
@@ -5056,11 +5056,11 @@
                 <a:solidFill>
                   <a:srgbClr val="243B53"/>
                 </a:solidFill>
-                <a:latin typeface="STSong"/>
-                <a:ea typeface="STSong"/>
-                <a:cs typeface="STSong"/>
-              </a:rPr>
-              <a:t>未把覆盖率当作质量结论，后续补充未覆盖分支</a:t>
+                <a:latin typeface="Arial"/>
+                <a:ea typeface="Arial"/>
+                <a:cs typeface="Arial"/>
+              </a:rPr>
+              <a:t>Coverage gaps remain in performance, concurrency, and extreme branches</a:t>
             </a:r>
           </a:p>
         </p:txBody>
@@ -5070,7 +5070,7 @@
           <p:cNvPr id="4" name="">
             <a:extLst xmlns:a="http://schemas.openxmlformats.org/drawingml/2006/main">
               <a:ext uri="{FF2B5EF4-FFF2-40B4-BE49-F238E27FC236}">
-                <a16:creationId xmlns:a16="http://schemas.microsoft.com/office/drawing/2014/main" id="{83545A38-EACF-447C-8004-F5464C6733CE}"/>
+                <a16:creationId xmlns:a16="http://schemas.microsoft.com/office/drawing/2014/main" id="{236A1A57-37F2-4493-98B1-5AEFBCA6643F}"/>
               </a:ext>
             </a:extLst>
           </p:cNvPr>
@@ -5101,9 +5101,9 @@
                 <a:solidFill>
                   <a:srgbClr val="829AB1"/>
                 </a:solidFill>
-                <a:latin typeface="STSong"/>
-                <a:ea typeface="STSong"/>
-                <a:cs typeface="STSong"/>
+                <a:latin typeface="Arial"/>
+                <a:ea typeface="Arial"/>
+                <a:cs typeface="Arial"/>
               </a:defRPr>
             </a:pPr>
             <a:r>
@@ -5111,9 +5111,9 @@
                 <a:solidFill>
                   <a:srgbClr val="829AB1"/>
                 </a:solidFill>
-                <a:latin typeface="STSong"/>
-                <a:ea typeface="STSong"/>
-                <a:cs typeface="STSong"/>
+                <a:latin typeface="Arial"/>
+                <a:ea typeface="Arial"/>
+                <a:cs typeface="Arial"/>
               </a:rPr>
               <a:t>09</a:t>
             </a:r>
@@ -5123,7 +5123,7 @@
     </p:spTree>
     <p:extLst>
       <p:ext uri="{BB962C8B-B14F-4D97-AF65-F5344CB8AC3E}">
-        <p14:creationId xmlns:p14="http://schemas.microsoft.com/office/powerpoint/2010/main" val="2071754953"/>
+        <p14:creationId xmlns:p14="http://schemas.microsoft.com/office/powerpoint/2010/main" val="817485748"/>
       </p:ext>
     </p:extLst>
   </p:cSld>
